--- a/References/ProjectSnaps.pptx
+++ b/References/ProjectSnaps.pptx
@@ -7,6 +7,11 @@
   <p:sldIdLst>
     <p:sldId id="256" r:id="rId2"/>
     <p:sldId id="257" r:id="rId3"/>
+    <p:sldId id="258" r:id="rId4"/>
+    <p:sldId id="259" r:id="rId5"/>
+    <p:sldId id="260" r:id="rId6"/>
+    <p:sldId id="261" r:id="rId7"/>
+    <p:sldId id="262" r:id="rId8"/>
   </p:sldIdLst>
   <p:sldSz cx="12192000" cy="6858000"/>
   <p:notesSz cx="6858000" cy="9144000"/>
@@ -105,6 +110,11 @@
       </a:defRPr>
     </a:lvl9pPr>
   </p:defaultTextStyle>
+  <p:extLst>
+    <p:ext uri="{EFAFB233-063F-42B5-8137-9DF3F51BA10A}">
+      <p15:sldGuideLst xmlns:p15="http://schemas.microsoft.com/office/powerpoint/2012/main"/>
+    </p:ext>
+  </p:extLst>
 </p:presentation>
 </file>
 
@@ -307,7 +317,7 @@
           <a:p>
             <a:fld id="{7DEE96FE-DC9C-4536-9FF4-6BA93424ACA5}" type="datetimeFigureOut">
               <a:rPr lang="en-US" smtClean="0"/>
-              <a:t>2/27/2026</a:t>
+              <a:t>2/28/2026</a:t>
             </a:fld>
             <a:endParaRPr lang="en-US"/>
           </a:p>
@@ -505,7 +515,7 @@
           <a:p>
             <a:fld id="{7DEE96FE-DC9C-4536-9FF4-6BA93424ACA5}" type="datetimeFigureOut">
               <a:rPr lang="en-US" smtClean="0"/>
-              <a:t>2/27/2026</a:t>
+              <a:t>2/28/2026</a:t>
             </a:fld>
             <a:endParaRPr lang="en-US"/>
           </a:p>
@@ -713,7 +723,7 @@
           <a:p>
             <a:fld id="{7DEE96FE-DC9C-4536-9FF4-6BA93424ACA5}" type="datetimeFigureOut">
               <a:rPr lang="en-US" smtClean="0"/>
-              <a:t>2/27/2026</a:t>
+              <a:t>2/28/2026</a:t>
             </a:fld>
             <a:endParaRPr lang="en-US"/>
           </a:p>
@@ -911,7 +921,7 @@
           <a:p>
             <a:fld id="{7DEE96FE-DC9C-4536-9FF4-6BA93424ACA5}" type="datetimeFigureOut">
               <a:rPr lang="en-US" smtClean="0"/>
-              <a:t>2/27/2026</a:t>
+              <a:t>2/28/2026</a:t>
             </a:fld>
             <a:endParaRPr lang="en-US"/>
           </a:p>
@@ -1186,7 +1196,7 @@
           <a:p>
             <a:fld id="{7DEE96FE-DC9C-4536-9FF4-6BA93424ACA5}" type="datetimeFigureOut">
               <a:rPr lang="en-US" smtClean="0"/>
-              <a:t>2/27/2026</a:t>
+              <a:t>2/28/2026</a:t>
             </a:fld>
             <a:endParaRPr lang="en-US"/>
           </a:p>
@@ -1451,7 +1461,7 @@
           <a:p>
             <a:fld id="{7DEE96FE-DC9C-4536-9FF4-6BA93424ACA5}" type="datetimeFigureOut">
               <a:rPr lang="en-US" smtClean="0"/>
-              <a:t>2/27/2026</a:t>
+              <a:t>2/28/2026</a:t>
             </a:fld>
             <a:endParaRPr lang="en-US"/>
           </a:p>
@@ -1863,7 +1873,7 @@
           <a:p>
             <a:fld id="{7DEE96FE-DC9C-4536-9FF4-6BA93424ACA5}" type="datetimeFigureOut">
               <a:rPr lang="en-US" smtClean="0"/>
-              <a:t>2/27/2026</a:t>
+              <a:t>2/28/2026</a:t>
             </a:fld>
             <a:endParaRPr lang="en-US"/>
           </a:p>
@@ -2004,7 +2014,7 @@
           <a:p>
             <a:fld id="{7DEE96FE-DC9C-4536-9FF4-6BA93424ACA5}" type="datetimeFigureOut">
               <a:rPr lang="en-US" smtClean="0"/>
-              <a:t>2/27/2026</a:t>
+              <a:t>2/28/2026</a:t>
             </a:fld>
             <a:endParaRPr lang="en-US"/>
           </a:p>
@@ -2117,7 +2127,7 @@
           <a:p>
             <a:fld id="{7DEE96FE-DC9C-4536-9FF4-6BA93424ACA5}" type="datetimeFigureOut">
               <a:rPr lang="en-US" smtClean="0"/>
-              <a:t>2/27/2026</a:t>
+              <a:t>2/28/2026</a:t>
             </a:fld>
             <a:endParaRPr lang="en-US"/>
           </a:p>
@@ -2428,7 +2438,7 @@
           <a:p>
             <a:fld id="{7DEE96FE-DC9C-4536-9FF4-6BA93424ACA5}" type="datetimeFigureOut">
               <a:rPr lang="en-US" smtClean="0"/>
-              <a:t>2/27/2026</a:t>
+              <a:t>2/28/2026</a:t>
             </a:fld>
             <a:endParaRPr lang="en-US"/>
           </a:p>
@@ -2716,7 +2726,7 @@
           <a:p>
             <a:fld id="{7DEE96FE-DC9C-4536-9FF4-6BA93424ACA5}" type="datetimeFigureOut">
               <a:rPr lang="en-US" smtClean="0"/>
-              <a:t>2/27/2026</a:t>
+              <a:t>2/28/2026</a:t>
             </a:fld>
             <a:endParaRPr lang="en-US"/>
           </a:p>
@@ -2957,7 +2967,7 @@
           <a:p>
             <a:fld id="{7DEE96FE-DC9C-4536-9FF4-6BA93424ACA5}" type="datetimeFigureOut">
               <a:rPr lang="en-US" smtClean="0"/>
-              <a:t>2/27/2026</a:t>
+              <a:t>2/28/2026</a:t>
             </a:fld>
             <a:endParaRPr lang="en-US"/>
           </a:p>
@@ -3475,10 +3485,418 @@
           <a:chExt cx="0" cy="0"/>
         </a:xfrm>
       </p:grpSpPr>
+      <p:sp>
+        <p:nvSpPr>
+          <p:cNvPr id="2" name="TextBox 1">
+            <a:extLst>
+              <a:ext uri="{FF2B5EF4-FFF2-40B4-BE49-F238E27FC236}">
+                <a16:creationId xmlns:a16="http://schemas.microsoft.com/office/drawing/2014/main" id="{D9F80F84-7DA0-EDA6-93EE-7BDA4A105B5A}"/>
+              </a:ext>
+            </a:extLst>
+          </p:cNvPr>
+          <p:cNvSpPr txBox="1"/>
+          <p:nvPr/>
+        </p:nvSpPr>
+        <p:spPr>
+          <a:xfrm>
+            <a:off x="597877" y="518746"/>
+            <a:ext cx="2092569" cy="646331"/>
+          </a:xfrm>
+          <a:prstGeom prst="rect">
+            <a:avLst/>
+          </a:prstGeom>
+          <a:noFill/>
+        </p:spPr>
+        <p:txBody>
+          <a:bodyPr wrap="square" rtlCol="0">
+            <a:spAutoFit/>
+          </a:bodyPr>
+          <a:lstStyle/>
+          <a:p>
+            <a:r>
+              <a:rPr lang="en-US" dirty="0"/>
+              <a:t>Adding Azure Functions app</a:t>
+            </a:r>
+          </a:p>
+        </p:txBody>
+      </p:sp>
+      <p:pic>
+        <p:nvPicPr>
+          <p:cNvPr id="4" name="Picture 3">
+            <a:extLst>
+              <a:ext uri="{FF2B5EF4-FFF2-40B4-BE49-F238E27FC236}">
+                <a16:creationId xmlns:a16="http://schemas.microsoft.com/office/drawing/2014/main" id="{E39A70FC-FEF1-384C-3C52-FD79809C6C4D}"/>
+              </a:ext>
+            </a:extLst>
+          </p:cNvPr>
+          <p:cNvPicPr>
+            <a:picLocks noChangeAspect="1"/>
+          </p:cNvPicPr>
+          <p:nvPr/>
+        </p:nvPicPr>
+        <p:blipFill>
+          <a:blip r:embed="rId2"/>
+          <a:stretch>
+            <a:fillRect/>
+          </a:stretch>
+        </p:blipFill>
+        <p:spPr>
+          <a:xfrm>
+            <a:off x="1814914" y="0"/>
+            <a:ext cx="8562172" cy="6858000"/>
+          </a:xfrm>
+          <a:prstGeom prst="rect">
+            <a:avLst/>
+          </a:prstGeom>
+        </p:spPr>
+      </p:pic>
     </p:spTree>
     <p:extLst>
       <p:ext uri="{BB962C8B-B14F-4D97-AF65-F5344CB8AC3E}">
         <p14:creationId xmlns:p14="http://schemas.microsoft.com/office/powerpoint/2010/main" val="993993506"/>
+      </p:ext>
+    </p:extLst>
+  </p:cSld>
+  <p:clrMapOvr>
+    <a:masterClrMapping/>
+  </p:clrMapOvr>
+</p:sld>
+</file>
+
+<file path=ppt/slides/slide3.xml><?xml version="1.0" encoding="utf-8"?>
+<p:sld xmlns:a="http://schemas.openxmlformats.org/drawingml/2006/main" xmlns:r="http://schemas.openxmlformats.org/officeDocument/2006/relationships" xmlns:p="http://schemas.openxmlformats.org/presentationml/2006/main">
+  <p:cSld>
+    <p:spTree>
+      <p:nvGrpSpPr>
+        <p:cNvPr id="1" name=""/>
+        <p:cNvGrpSpPr/>
+        <p:nvPr/>
+      </p:nvGrpSpPr>
+      <p:grpSpPr>
+        <a:xfrm>
+          <a:off x="0" y="0"/>
+          <a:ext cx="0" cy="0"/>
+          <a:chOff x="0" y="0"/>
+          <a:chExt cx="0" cy="0"/>
+        </a:xfrm>
+      </p:grpSpPr>
+      <p:pic>
+        <p:nvPicPr>
+          <p:cNvPr id="3" name="Picture 2">
+            <a:extLst>
+              <a:ext uri="{FF2B5EF4-FFF2-40B4-BE49-F238E27FC236}">
+                <a16:creationId xmlns:a16="http://schemas.microsoft.com/office/drawing/2014/main" id="{FF8D535B-A547-10A7-7968-004EB1FC81FF}"/>
+              </a:ext>
+            </a:extLst>
+          </p:cNvPr>
+          <p:cNvPicPr>
+            <a:picLocks noChangeAspect="1"/>
+          </p:cNvPicPr>
+          <p:nvPr/>
+        </p:nvPicPr>
+        <p:blipFill>
+          <a:blip r:embed="rId2"/>
+          <a:stretch>
+            <a:fillRect/>
+          </a:stretch>
+        </p:blipFill>
+        <p:spPr>
+          <a:xfrm>
+            <a:off x="1814914" y="0"/>
+            <a:ext cx="8562172" cy="6858000"/>
+          </a:xfrm>
+          <a:prstGeom prst="rect">
+            <a:avLst/>
+          </a:prstGeom>
+        </p:spPr>
+      </p:pic>
+    </p:spTree>
+    <p:extLst>
+      <p:ext uri="{BB962C8B-B14F-4D97-AF65-F5344CB8AC3E}">
+        <p14:creationId xmlns:p14="http://schemas.microsoft.com/office/powerpoint/2010/main" val="3720972096"/>
+      </p:ext>
+    </p:extLst>
+  </p:cSld>
+  <p:clrMapOvr>
+    <a:masterClrMapping/>
+  </p:clrMapOvr>
+</p:sld>
+</file>
+
+<file path=ppt/slides/slide4.xml><?xml version="1.0" encoding="utf-8"?>
+<p:sld xmlns:a="http://schemas.openxmlformats.org/drawingml/2006/main" xmlns:r="http://schemas.openxmlformats.org/officeDocument/2006/relationships" xmlns:p="http://schemas.openxmlformats.org/presentationml/2006/main">
+  <p:cSld>
+    <p:spTree>
+      <p:nvGrpSpPr>
+        <p:cNvPr id="1" name=""/>
+        <p:cNvGrpSpPr/>
+        <p:nvPr/>
+      </p:nvGrpSpPr>
+      <p:grpSpPr>
+        <a:xfrm>
+          <a:off x="0" y="0"/>
+          <a:ext cx="0" cy="0"/>
+          <a:chOff x="0" y="0"/>
+          <a:chExt cx="0" cy="0"/>
+        </a:xfrm>
+      </p:grpSpPr>
+      <p:pic>
+        <p:nvPicPr>
+          <p:cNvPr id="3" name="Picture 2">
+            <a:extLst>
+              <a:ext uri="{FF2B5EF4-FFF2-40B4-BE49-F238E27FC236}">
+                <a16:creationId xmlns:a16="http://schemas.microsoft.com/office/drawing/2014/main" id="{9823891C-D735-0137-4920-8D4F33286F1F}"/>
+              </a:ext>
+            </a:extLst>
+          </p:cNvPr>
+          <p:cNvPicPr>
+            <a:picLocks noChangeAspect="1"/>
+          </p:cNvPicPr>
+          <p:nvPr/>
+        </p:nvPicPr>
+        <p:blipFill>
+          <a:blip r:embed="rId2"/>
+          <a:stretch>
+            <a:fillRect/>
+          </a:stretch>
+        </p:blipFill>
+        <p:spPr>
+          <a:xfrm>
+            <a:off x="1814914" y="0"/>
+            <a:ext cx="8562172" cy="6858000"/>
+          </a:xfrm>
+          <a:prstGeom prst="rect">
+            <a:avLst/>
+          </a:prstGeom>
+        </p:spPr>
+      </p:pic>
+    </p:spTree>
+    <p:extLst>
+      <p:ext uri="{BB962C8B-B14F-4D97-AF65-F5344CB8AC3E}">
+        <p14:creationId xmlns:p14="http://schemas.microsoft.com/office/powerpoint/2010/main" val="83128248"/>
+      </p:ext>
+    </p:extLst>
+  </p:cSld>
+  <p:clrMapOvr>
+    <a:masterClrMapping/>
+  </p:clrMapOvr>
+</p:sld>
+</file>
+
+<file path=ppt/slides/slide5.xml><?xml version="1.0" encoding="utf-8"?>
+<p:sld xmlns:a="http://schemas.openxmlformats.org/drawingml/2006/main" xmlns:r="http://schemas.openxmlformats.org/officeDocument/2006/relationships" xmlns:p="http://schemas.openxmlformats.org/presentationml/2006/main">
+  <p:cSld>
+    <p:spTree>
+      <p:nvGrpSpPr>
+        <p:cNvPr id="1" name=""/>
+        <p:cNvGrpSpPr/>
+        <p:nvPr/>
+      </p:nvGrpSpPr>
+      <p:grpSpPr>
+        <a:xfrm>
+          <a:off x="0" y="0"/>
+          <a:ext cx="0" cy="0"/>
+          <a:chOff x="0" y="0"/>
+          <a:chExt cx="0" cy="0"/>
+        </a:xfrm>
+      </p:grpSpPr>
+      <p:pic>
+        <p:nvPicPr>
+          <p:cNvPr id="3" name="Picture 2">
+            <a:extLst>
+              <a:ext uri="{FF2B5EF4-FFF2-40B4-BE49-F238E27FC236}">
+                <a16:creationId xmlns:a16="http://schemas.microsoft.com/office/drawing/2014/main" id="{B7FE5DFF-C9E8-67CC-95B2-5E4F19517EE2}"/>
+              </a:ext>
+            </a:extLst>
+          </p:cNvPr>
+          <p:cNvPicPr>
+            <a:picLocks noChangeAspect="1"/>
+          </p:cNvPicPr>
+          <p:nvPr/>
+        </p:nvPicPr>
+        <p:blipFill>
+          <a:blip r:embed="rId2"/>
+          <a:stretch>
+            <a:fillRect/>
+          </a:stretch>
+        </p:blipFill>
+        <p:spPr>
+          <a:xfrm>
+            <a:off x="1814914" y="0"/>
+            <a:ext cx="8562172" cy="6858000"/>
+          </a:xfrm>
+          <a:prstGeom prst="rect">
+            <a:avLst/>
+          </a:prstGeom>
+        </p:spPr>
+      </p:pic>
+    </p:spTree>
+    <p:extLst>
+      <p:ext uri="{BB962C8B-B14F-4D97-AF65-F5344CB8AC3E}">
+        <p14:creationId xmlns:p14="http://schemas.microsoft.com/office/powerpoint/2010/main" val="2125830670"/>
+      </p:ext>
+    </p:extLst>
+  </p:cSld>
+  <p:clrMapOvr>
+    <a:masterClrMapping/>
+  </p:clrMapOvr>
+</p:sld>
+</file>
+
+<file path=ppt/slides/slide6.xml><?xml version="1.0" encoding="utf-8"?>
+<p:sld xmlns:a="http://schemas.openxmlformats.org/drawingml/2006/main" xmlns:r="http://schemas.openxmlformats.org/officeDocument/2006/relationships" xmlns:p="http://schemas.openxmlformats.org/presentationml/2006/main">
+  <p:cSld>
+    <p:spTree>
+      <p:nvGrpSpPr>
+        <p:cNvPr id="1" name=""/>
+        <p:cNvGrpSpPr/>
+        <p:nvPr/>
+      </p:nvGrpSpPr>
+      <p:grpSpPr>
+        <a:xfrm>
+          <a:off x="0" y="0"/>
+          <a:ext cx="0" cy="0"/>
+          <a:chOff x="0" y="0"/>
+          <a:chExt cx="0" cy="0"/>
+        </a:xfrm>
+      </p:grpSpPr>
+      <p:pic>
+        <p:nvPicPr>
+          <p:cNvPr id="3" name="Picture 2">
+            <a:extLst>
+              <a:ext uri="{FF2B5EF4-FFF2-40B4-BE49-F238E27FC236}">
+                <a16:creationId xmlns:a16="http://schemas.microsoft.com/office/drawing/2014/main" id="{7227FB9D-3E38-3707-FC4E-AAD21489BE27}"/>
+              </a:ext>
+            </a:extLst>
+          </p:cNvPr>
+          <p:cNvPicPr>
+            <a:picLocks noChangeAspect="1"/>
+          </p:cNvPicPr>
+          <p:nvPr/>
+        </p:nvPicPr>
+        <p:blipFill>
+          <a:blip r:embed="rId2"/>
+          <a:stretch>
+            <a:fillRect/>
+          </a:stretch>
+        </p:blipFill>
+        <p:spPr>
+          <a:xfrm>
+            <a:off x="4616674" y="0"/>
+            <a:ext cx="7575326" cy="6858000"/>
+          </a:xfrm>
+          <a:prstGeom prst="rect">
+            <a:avLst/>
+          </a:prstGeom>
+        </p:spPr>
+      </p:pic>
+      <p:sp>
+        <p:nvSpPr>
+          <p:cNvPr id="4" name="TextBox 3">
+            <a:extLst>
+              <a:ext uri="{FF2B5EF4-FFF2-40B4-BE49-F238E27FC236}">
+                <a16:creationId xmlns:a16="http://schemas.microsoft.com/office/drawing/2014/main" id="{19D66657-158B-83E6-8AA2-49589CF72AE4}"/>
+              </a:ext>
+            </a:extLst>
+          </p:cNvPr>
+          <p:cNvSpPr txBox="1"/>
+          <p:nvPr/>
+        </p:nvSpPr>
+        <p:spPr>
+          <a:xfrm>
+            <a:off x="430823" y="465992"/>
+            <a:ext cx="2699239" cy="1754326"/>
+          </a:xfrm>
+          <a:prstGeom prst="rect">
+            <a:avLst/>
+          </a:prstGeom>
+          <a:noFill/>
+        </p:spPr>
+        <p:txBody>
+          <a:bodyPr wrap="square" rtlCol="0">
+            <a:spAutoFit/>
+          </a:bodyPr>
+          <a:lstStyle/>
+          <a:p>
+            <a:r>
+              <a:rPr lang="en-US" dirty="0"/>
+              <a:t>Scary! Had to read this over a few times. I need Outbound public access to SQL over the </a:t>
+            </a:r>
+            <a:r>
+              <a:rPr lang="en-US" dirty="0" err="1"/>
+              <a:t>vnet</a:t>
+            </a:r>
+            <a:r>
+              <a:rPr lang="en-US" dirty="0"/>
+              <a:t> and Inbound public for testing.</a:t>
+            </a:r>
+          </a:p>
+        </p:txBody>
+      </p:sp>
+    </p:spTree>
+    <p:extLst>
+      <p:ext uri="{BB962C8B-B14F-4D97-AF65-F5344CB8AC3E}">
+        <p14:creationId xmlns:p14="http://schemas.microsoft.com/office/powerpoint/2010/main" val="4260335236"/>
+      </p:ext>
+    </p:extLst>
+  </p:cSld>
+  <p:clrMapOvr>
+    <a:masterClrMapping/>
+  </p:clrMapOvr>
+</p:sld>
+</file>
+
+<file path=ppt/slides/slide7.xml><?xml version="1.0" encoding="utf-8"?>
+<p:sld xmlns:a="http://schemas.openxmlformats.org/drawingml/2006/main" xmlns:r="http://schemas.openxmlformats.org/officeDocument/2006/relationships" xmlns:p="http://schemas.openxmlformats.org/presentationml/2006/main">
+  <p:cSld>
+    <p:spTree>
+      <p:nvGrpSpPr>
+        <p:cNvPr id="1" name=""/>
+        <p:cNvGrpSpPr/>
+        <p:nvPr/>
+      </p:nvGrpSpPr>
+      <p:grpSpPr>
+        <a:xfrm>
+          <a:off x="0" y="0"/>
+          <a:ext cx="0" cy="0"/>
+          <a:chOff x="0" y="0"/>
+          <a:chExt cx="0" cy="0"/>
+        </a:xfrm>
+      </p:grpSpPr>
+      <p:pic>
+        <p:nvPicPr>
+          <p:cNvPr id="3" name="Picture 2">
+            <a:extLst>
+              <a:ext uri="{FF2B5EF4-FFF2-40B4-BE49-F238E27FC236}">
+                <a16:creationId xmlns:a16="http://schemas.microsoft.com/office/drawing/2014/main" id="{F19187BC-CA8E-BE47-ADB1-3BB7EB7A4D5A}"/>
+              </a:ext>
+            </a:extLst>
+          </p:cNvPr>
+          <p:cNvPicPr>
+            <a:picLocks noChangeAspect="1"/>
+          </p:cNvPicPr>
+          <p:nvPr/>
+        </p:nvPicPr>
+        <p:blipFill>
+          <a:blip r:embed="rId2"/>
+          <a:stretch>
+            <a:fillRect/>
+          </a:stretch>
+        </p:blipFill>
+        <p:spPr>
+          <a:xfrm>
+            <a:off x="4616674" y="0"/>
+            <a:ext cx="7575326" cy="6858000"/>
+          </a:xfrm>
+          <a:prstGeom prst="rect">
+            <a:avLst/>
+          </a:prstGeom>
+        </p:spPr>
+      </p:pic>
+    </p:spTree>
+    <p:extLst>
+      <p:ext uri="{BB962C8B-B14F-4D97-AF65-F5344CB8AC3E}">
+        <p14:creationId xmlns:p14="http://schemas.microsoft.com/office/powerpoint/2010/main" val="165184747"/>
       </p:ext>
     </p:extLst>
   </p:cSld>

--- a/References/ProjectSnaps.pptx
+++ b/References/ProjectSnaps.pptx
@@ -12,6 +12,14 @@
     <p:sldId id="260" r:id="rId6"/>
     <p:sldId id="261" r:id="rId7"/>
     <p:sldId id="262" r:id="rId8"/>
+    <p:sldId id="263" r:id="rId9"/>
+    <p:sldId id="264" r:id="rId10"/>
+    <p:sldId id="265" r:id="rId11"/>
+    <p:sldId id="266" r:id="rId12"/>
+    <p:sldId id="267" r:id="rId13"/>
+    <p:sldId id="268" r:id="rId14"/>
+    <p:sldId id="269" r:id="rId15"/>
+    <p:sldId id="270" r:id="rId16"/>
   </p:sldIdLst>
   <p:sldSz cx="12192000" cy="6858000"/>
   <p:notesSz cx="6858000" cy="9144000"/>
@@ -3468,6 +3476,563 @@
 </p:sld>
 </file>
 
+<file path=ppt/slides/slide10.xml><?xml version="1.0" encoding="utf-8"?>
+<p:sld xmlns:a="http://schemas.openxmlformats.org/drawingml/2006/main" xmlns:r="http://schemas.openxmlformats.org/officeDocument/2006/relationships" xmlns:p="http://schemas.openxmlformats.org/presentationml/2006/main">
+  <p:cSld>
+    <p:spTree>
+      <p:nvGrpSpPr>
+        <p:cNvPr id="1" name=""/>
+        <p:cNvGrpSpPr/>
+        <p:nvPr/>
+      </p:nvGrpSpPr>
+      <p:grpSpPr>
+        <a:xfrm>
+          <a:off x="0" y="0"/>
+          <a:ext cx="0" cy="0"/>
+          <a:chOff x="0" y="0"/>
+          <a:chExt cx="0" cy="0"/>
+        </a:xfrm>
+      </p:grpSpPr>
+      <p:pic>
+        <p:nvPicPr>
+          <p:cNvPr id="3" name="Picture 2">
+            <a:extLst>
+              <a:ext uri="{FF2B5EF4-FFF2-40B4-BE49-F238E27FC236}">
+                <a16:creationId xmlns:a16="http://schemas.microsoft.com/office/drawing/2014/main" id="{83A752B3-875D-2B43-2C43-F1376050C48E}"/>
+              </a:ext>
+            </a:extLst>
+          </p:cNvPr>
+          <p:cNvPicPr>
+            <a:picLocks noChangeAspect="1"/>
+          </p:cNvPicPr>
+          <p:nvPr/>
+        </p:nvPicPr>
+        <p:blipFill>
+          <a:blip r:embed="rId2"/>
+          <a:stretch>
+            <a:fillRect/>
+          </a:stretch>
+        </p:blipFill>
+        <p:spPr>
+          <a:xfrm>
+            <a:off x="4616674" y="0"/>
+            <a:ext cx="7575326" cy="6858000"/>
+          </a:xfrm>
+          <a:prstGeom prst="rect">
+            <a:avLst/>
+          </a:prstGeom>
+        </p:spPr>
+      </p:pic>
+    </p:spTree>
+    <p:extLst>
+      <p:ext uri="{BB962C8B-B14F-4D97-AF65-F5344CB8AC3E}">
+        <p14:creationId xmlns:p14="http://schemas.microsoft.com/office/powerpoint/2010/main" val="1037663936"/>
+      </p:ext>
+    </p:extLst>
+  </p:cSld>
+  <p:clrMapOvr>
+    <a:masterClrMapping/>
+  </p:clrMapOvr>
+</p:sld>
+</file>
+
+<file path=ppt/slides/slide11.xml><?xml version="1.0" encoding="utf-8"?>
+<p:sld xmlns:a="http://schemas.openxmlformats.org/drawingml/2006/main" xmlns:r="http://schemas.openxmlformats.org/officeDocument/2006/relationships" xmlns:p="http://schemas.openxmlformats.org/presentationml/2006/main">
+  <p:cSld>
+    <p:spTree>
+      <p:nvGrpSpPr>
+        <p:cNvPr id="1" name=""/>
+        <p:cNvGrpSpPr/>
+        <p:nvPr/>
+      </p:nvGrpSpPr>
+      <p:grpSpPr>
+        <a:xfrm>
+          <a:off x="0" y="0"/>
+          <a:ext cx="0" cy="0"/>
+          <a:chOff x="0" y="0"/>
+          <a:chExt cx="0" cy="0"/>
+        </a:xfrm>
+      </p:grpSpPr>
+      <p:pic>
+        <p:nvPicPr>
+          <p:cNvPr id="3" name="Picture 2">
+            <a:extLst>
+              <a:ext uri="{FF2B5EF4-FFF2-40B4-BE49-F238E27FC236}">
+                <a16:creationId xmlns:a16="http://schemas.microsoft.com/office/drawing/2014/main" id="{4B2130EF-4C55-E90E-1D07-D57E4E935C90}"/>
+              </a:ext>
+            </a:extLst>
+          </p:cNvPr>
+          <p:cNvPicPr>
+            <a:picLocks noChangeAspect="1"/>
+          </p:cNvPicPr>
+          <p:nvPr/>
+        </p:nvPicPr>
+        <p:blipFill>
+          <a:blip r:embed="rId2"/>
+          <a:stretch>
+            <a:fillRect/>
+          </a:stretch>
+        </p:blipFill>
+        <p:spPr>
+          <a:xfrm>
+            <a:off x="4616674" y="0"/>
+            <a:ext cx="7575326" cy="6858000"/>
+          </a:xfrm>
+          <a:prstGeom prst="rect">
+            <a:avLst/>
+          </a:prstGeom>
+        </p:spPr>
+      </p:pic>
+      <p:sp>
+        <p:nvSpPr>
+          <p:cNvPr id="4" name="TextBox 3">
+            <a:extLst>
+              <a:ext uri="{FF2B5EF4-FFF2-40B4-BE49-F238E27FC236}">
+                <a16:creationId xmlns:a16="http://schemas.microsoft.com/office/drawing/2014/main" id="{4B7A89F9-EA3A-7B3A-A4A7-C5E97D87E42C}"/>
+              </a:ext>
+            </a:extLst>
+          </p:cNvPr>
+          <p:cNvSpPr txBox="1"/>
+          <p:nvPr/>
+        </p:nvSpPr>
+        <p:spPr>
+          <a:xfrm>
+            <a:off x="404445" y="606668"/>
+            <a:ext cx="4062047" cy="4493538"/>
+          </a:xfrm>
+          <a:prstGeom prst="rect">
+            <a:avLst/>
+          </a:prstGeom>
+          <a:noFill/>
+        </p:spPr>
+        <p:txBody>
+          <a:bodyPr wrap="square" rtlCol="0">
+            <a:spAutoFit/>
+          </a:bodyPr>
+          <a:lstStyle/>
+          <a:p>
+            <a:r>
+              <a:rPr lang="en-US" sz="1100" dirty="0"/>
+              <a:t>Add the WEBSITE_VNET_ROUTE_ALL to </a:t>
+            </a:r>
+            <a:r>
+              <a:rPr lang="en-US" sz="1100" dirty="0" err="1"/>
+              <a:t>Enviropnment</a:t>
+            </a:r>
+            <a:r>
+              <a:rPr lang="en-US" sz="1100" dirty="0"/>
+              <a:t> vars.</a:t>
+            </a:r>
+          </a:p>
+          <a:p>
+            <a:r>
+              <a:rPr lang="en-US" sz="1100" b="1" dirty="0"/>
+              <a:t>Purpose of WEBSITE_VNET_ROUTE_ALL=1</a:t>
+            </a:r>
+          </a:p>
+          <a:p>
+            <a:r>
+              <a:rPr lang="en-US" sz="1100" dirty="0"/>
+              <a:t>This is a special app setting for Azure App Service / Azure Functions when you have </a:t>
+            </a:r>
+            <a:r>
+              <a:rPr lang="en-US" sz="1100" b="1" dirty="0" err="1"/>
+              <a:t>VNet</a:t>
+            </a:r>
+            <a:r>
+              <a:rPr lang="en-US" sz="1100" b="1" dirty="0"/>
+              <a:t> Integration</a:t>
+            </a:r>
+            <a:r>
+              <a:rPr lang="en-US" sz="1100" dirty="0"/>
+              <a:t> enabled.</a:t>
+            </a:r>
+          </a:p>
+          <a:p>
+            <a:r>
+              <a:rPr lang="en-US" sz="1100" b="1" dirty="0"/>
+              <a:t>Default behavior (0 or not set)</a:t>
+            </a:r>
+            <a:r>
+              <a:rPr lang="en-US" sz="1100" dirty="0"/>
+              <a:t>: Only </a:t>
+            </a:r>
+            <a:r>
+              <a:rPr lang="en-US" sz="1100" b="1" dirty="0"/>
+              <a:t>private</a:t>
+            </a:r>
+            <a:r>
+              <a:rPr lang="en-US" sz="1100" dirty="0"/>
+              <a:t> outbound traffic (RFC 1918 addresses like 10.x.x.x, 172.16.x.x, 192.168.x.x) is sent through your </a:t>
+            </a:r>
+            <a:r>
+              <a:rPr lang="en-US" sz="1100" dirty="0" err="1"/>
+              <a:t>VNet</a:t>
+            </a:r>
+            <a:r>
+              <a:rPr lang="en-US" sz="1100" dirty="0"/>
+              <a:t>/subnet. All public internet traffic goes straight out to the internet.</a:t>
+            </a:r>
+          </a:p>
+          <a:p>
+            <a:r>
+              <a:rPr lang="en-US" sz="1100" b="1" dirty="0"/>
+              <a:t>When set to 1</a:t>
+            </a:r>
+            <a:r>
+              <a:rPr lang="en-US" sz="1100" dirty="0"/>
+              <a:t>: </a:t>
+            </a:r>
+            <a:r>
+              <a:rPr lang="en-US" sz="1100" b="1" dirty="0"/>
+              <a:t>ALL</a:t>
+            </a:r>
+            <a:r>
+              <a:rPr lang="en-US" sz="1100" dirty="0"/>
+              <a:t> outbound traffic from your Function App (private + public internet) is forced through the </a:t>
+            </a:r>
+            <a:r>
+              <a:rPr lang="en-US" sz="1100" dirty="0" err="1"/>
+              <a:t>VNet</a:t>
+            </a:r>
+            <a:r>
+              <a:rPr lang="en-US" sz="1100" dirty="0"/>
+              <a:t> integration subnet (in your case, WebApp-Subnet).</a:t>
+            </a:r>
+          </a:p>
+          <a:p>
+            <a:r>
+              <a:rPr lang="en-US" sz="1100" b="1" dirty="0"/>
+              <a:t>Why we set it for your project</a:t>
+            </a:r>
+            <a:r>
+              <a:rPr lang="en-US" sz="1100" dirty="0"/>
+              <a:t>:</a:t>
+            </a:r>
+          </a:p>
+          <a:p>
+            <a:r>
+              <a:rPr lang="en-US" sz="1100" dirty="0"/>
+              <a:t>Your SQL connection string uses the public-looking name dr-helpdesk-sql-2026.database.windows.net.</a:t>
+            </a:r>
+          </a:p>
+          <a:p>
+            <a:r>
+              <a:rPr lang="en-US" sz="1100" dirty="0"/>
+              <a:t>That name resolves (via your private DNS zone) to a </a:t>
+            </a:r>
+            <a:r>
+              <a:rPr lang="en-US" sz="1100" b="1" dirty="0"/>
+              <a:t>private IP</a:t>
+            </a:r>
+            <a:r>
+              <a:rPr lang="en-US" sz="1100" dirty="0"/>
+              <a:t> in Database-Subnet.</a:t>
+            </a:r>
+          </a:p>
+          <a:p>
+            <a:r>
+              <a:rPr lang="en-US" sz="1100" dirty="0"/>
+              <a:t>Setting this to 1 guarantees the traffic is routed correctly through the </a:t>
+            </a:r>
+            <a:r>
+              <a:rPr lang="en-US" sz="1100" dirty="0" err="1"/>
+              <a:t>VNet</a:t>
+            </a:r>
+            <a:r>
+              <a:rPr lang="en-US" sz="1100" dirty="0"/>
+              <a:t> → hits the Private Endpoint reliably.</a:t>
+            </a:r>
+          </a:p>
+          <a:p>
+            <a:r>
+              <a:rPr lang="en-US" sz="1100" dirty="0"/>
+              <a:t>It also handles DNS resolution, storage account access (for Functions runtime), and any other outbound calls consistently.</a:t>
+            </a:r>
+          </a:p>
+          <a:p>
+            <a:r>
+              <a:rPr lang="en-US" sz="1100" dirty="0"/>
+              <a:t>Without it, you can sometimes hit intermittent “cannot reach SQL” or DNS issues, especially with cross-region setups like yours (East US </a:t>
+            </a:r>
+            <a:r>
+              <a:rPr lang="en-US" sz="1100" dirty="0" err="1"/>
+              <a:t>VNet</a:t>
+            </a:r>
+            <a:r>
+              <a:rPr lang="en-US" sz="1100" dirty="0"/>
+              <a:t> → Central US SQL).</a:t>
+            </a:r>
+          </a:p>
+          <a:p>
+            <a:r>
+              <a:rPr lang="en-US" sz="1100" dirty="0"/>
+              <a:t>It’s the standard, battle-tested way to make private SQL + Functions work smoothly.</a:t>
+            </a:r>
+          </a:p>
+          <a:p>
+            <a:endParaRPr lang="en-US" sz="1100" dirty="0"/>
+          </a:p>
+        </p:txBody>
+      </p:sp>
+    </p:spTree>
+    <p:extLst>
+      <p:ext uri="{BB962C8B-B14F-4D97-AF65-F5344CB8AC3E}">
+        <p14:creationId xmlns:p14="http://schemas.microsoft.com/office/powerpoint/2010/main" val="3048681326"/>
+      </p:ext>
+    </p:extLst>
+  </p:cSld>
+  <p:clrMapOvr>
+    <a:masterClrMapping/>
+  </p:clrMapOvr>
+</p:sld>
+</file>
+
+<file path=ppt/slides/slide12.xml><?xml version="1.0" encoding="utf-8"?>
+<p:sld xmlns:a="http://schemas.openxmlformats.org/drawingml/2006/main" xmlns:r="http://schemas.openxmlformats.org/officeDocument/2006/relationships" xmlns:p="http://schemas.openxmlformats.org/presentationml/2006/main">
+  <p:cSld>
+    <p:spTree>
+      <p:nvGrpSpPr>
+        <p:cNvPr id="1" name=""/>
+        <p:cNvGrpSpPr/>
+        <p:nvPr/>
+      </p:nvGrpSpPr>
+      <p:grpSpPr>
+        <a:xfrm>
+          <a:off x="0" y="0"/>
+          <a:ext cx="0" cy="0"/>
+          <a:chOff x="0" y="0"/>
+          <a:chExt cx="0" cy="0"/>
+        </a:xfrm>
+      </p:grpSpPr>
+      <p:pic>
+        <p:nvPicPr>
+          <p:cNvPr id="3" name="Picture 2">
+            <a:extLst>
+              <a:ext uri="{FF2B5EF4-FFF2-40B4-BE49-F238E27FC236}">
+                <a16:creationId xmlns:a16="http://schemas.microsoft.com/office/drawing/2014/main" id="{AEC4729C-E45A-2680-E420-B1B9F38B82DD}"/>
+              </a:ext>
+            </a:extLst>
+          </p:cNvPr>
+          <p:cNvPicPr>
+            <a:picLocks noChangeAspect="1"/>
+          </p:cNvPicPr>
+          <p:nvPr/>
+        </p:nvPicPr>
+        <p:blipFill>
+          <a:blip r:embed="rId2"/>
+          <a:stretch>
+            <a:fillRect/>
+          </a:stretch>
+        </p:blipFill>
+        <p:spPr>
+          <a:xfrm>
+            <a:off x="1857375" y="690562"/>
+            <a:ext cx="8477250" cy="5476875"/>
+          </a:xfrm>
+          <a:prstGeom prst="rect">
+            <a:avLst/>
+          </a:prstGeom>
+        </p:spPr>
+      </p:pic>
+    </p:spTree>
+    <p:extLst>
+      <p:ext uri="{BB962C8B-B14F-4D97-AF65-F5344CB8AC3E}">
+        <p14:creationId xmlns:p14="http://schemas.microsoft.com/office/powerpoint/2010/main" val="4175307836"/>
+      </p:ext>
+    </p:extLst>
+  </p:cSld>
+  <p:clrMapOvr>
+    <a:masterClrMapping/>
+  </p:clrMapOvr>
+</p:sld>
+</file>
+
+<file path=ppt/slides/slide13.xml><?xml version="1.0" encoding="utf-8"?>
+<p:sld xmlns:a="http://schemas.openxmlformats.org/drawingml/2006/main" xmlns:r="http://schemas.openxmlformats.org/officeDocument/2006/relationships" xmlns:p="http://schemas.openxmlformats.org/presentationml/2006/main">
+  <p:cSld>
+    <p:spTree>
+      <p:nvGrpSpPr>
+        <p:cNvPr id="1" name=""/>
+        <p:cNvGrpSpPr/>
+        <p:nvPr/>
+      </p:nvGrpSpPr>
+      <p:grpSpPr>
+        <a:xfrm>
+          <a:off x="0" y="0"/>
+          <a:ext cx="0" cy="0"/>
+          <a:chOff x="0" y="0"/>
+          <a:chExt cx="0" cy="0"/>
+        </a:xfrm>
+      </p:grpSpPr>
+      <p:pic>
+        <p:nvPicPr>
+          <p:cNvPr id="3" name="Picture 2">
+            <a:extLst>
+              <a:ext uri="{FF2B5EF4-FFF2-40B4-BE49-F238E27FC236}">
+                <a16:creationId xmlns:a16="http://schemas.microsoft.com/office/drawing/2014/main" id="{E2787B9B-AB72-0BB3-37D9-EC2AA8143876}"/>
+              </a:ext>
+            </a:extLst>
+          </p:cNvPr>
+          <p:cNvPicPr>
+            <a:picLocks noChangeAspect="1"/>
+          </p:cNvPicPr>
+          <p:nvPr/>
+        </p:nvPicPr>
+        <p:blipFill>
+          <a:blip r:embed="rId2"/>
+          <a:stretch>
+            <a:fillRect/>
+          </a:stretch>
+        </p:blipFill>
+        <p:spPr>
+          <a:xfrm>
+            <a:off x="1857375" y="690562"/>
+            <a:ext cx="8477250" cy="5476875"/>
+          </a:xfrm>
+          <a:prstGeom prst="rect">
+            <a:avLst/>
+          </a:prstGeom>
+        </p:spPr>
+      </p:pic>
+    </p:spTree>
+    <p:extLst>
+      <p:ext uri="{BB962C8B-B14F-4D97-AF65-F5344CB8AC3E}">
+        <p14:creationId xmlns:p14="http://schemas.microsoft.com/office/powerpoint/2010/main" val="3373311509"/>
+      </p:ext>
+    </p:extLst>
+  </p:cSld>
+  <p:clrMapOvr>
+    <a:masterClrMapping/>
+  </p:clrMapOvr>
+</p:sld>
+</file>
+
+<file path=ppt/slides/slide14.xml><?xml version="1.0" encoding="utf-8"?>
+<p:sld xmlns:a="http://schemas.openxmlformats.org/drawingml/2006/main" xmlns:r="http://schemas.openxmlformats.org/officeDocument/2006/relationships" xmlns:p="http://schemas.openxmlformats.org/presentationml/2006/main">
+  <p:cSld>
+    <p:spTree>
+      <p:nvGrpSpPr>
+        <p:cNvPr id="1" name=""/>
+        <p:cNvGrpSpPr/>
+        <p:nvPr/>
+      </p:nvGrpSpPr>
+      <p:grpSpPr>
+        <a:xfrm>
+          <a:off x="0" y="0"/>
+          <a:ext cx="0" cy="0"/>
+          <a:chOff x="0" y="0"/>
+          <a:chExt cx="0" cy="0"/>
+        </a:xfrm>
+      </p:grpSpPr>
+      <p:pic>
+        <p:nvPicPr>
+          <p:cNvPr id="3" name="Picture 2">
+            <a:extLst>
+              <a:ext uri="{FF2B5EF4-FFF2-40B4-BE49-F238E27FC236}">
+                <a16:creationId xmlns:a16="http://schemas.microsoft.com/office/drawing/2014/main" id="{1A021BFD-447D-DC9B-9214-DC6D4C8F69EE}"/>
+              </a:ext>
+            </a:extLst>
+          </p:cNvPr>
+          <p:cNvPicPr>
+            <a:picLocks noChangeAspect="1"/>
+          </p:cNvPicPr>
+          <p:nvPr/>
+        </p:nvPicPr>
+        <p:blipFill>
+          <a:blip r:embed="rId2"/>
+          <a:stretch>
+            <a:fillRect/>
+          </a:stretch>
+        </p:blipFill>
+        <p:spPr>
+          <a:xfrm>
+            <a:off x="4616674" y="0"/>
+            <a:ext cx="7575326" cy="6858000"/>
+          </a:xfrm>
+          <a:prstGeom prst="rect">
+            <a:avLst/>
+          </a:prstGeom>
+        </p:spPr>
+      </p:pic>
+      <p:sp>
+        <p:nvSpPr>
+          <p:cNvPr id="4" name="TextBox 3">
+            <a:extLst>
+              <a:ext uri="{FF2B5EF4-FFF2-40B4-BE49-F238E27FC236}">
+                <a16:creationId xmlns:a16="http://schemas.microsoft.com/office/drawing/2014/main" id="{303E087E-0F7F-5119-5C40-36BFDA854FFA}"/>
+              </a:ext>
+            </a:extLst>
+          </p:cNvPr>
+          <p:cNvSpPr txBox="1"/>
+          <p:nvPr/>
+        </p:nvSpPr>
+        <p:spPr>
+          <a:xfrm>
+            <a:off x="509954" y="378069"/>
+            <a:ext cx="2839915" cy="923330"/>
+          </a:xfrm>
+          <a:prstGeom prst="rect">
+            <a:avLst/>
+          </a:prstGeom>
+          <a:noFill/>
+        </p:spPr>
+        <p:txBody>
+          <a:bodyPr wrap="square" rtlCol="0">
+            <a:spAutoFit/>
+          </a:bodyPr>
+          <a:lstStyle/>
+          <a:p>
+            <a:r>
+              <a:rPr lang="en-US" dirty="0"/>
+              <a:t>Add the SQL connection string as an environment var in app</a:t>
+            </a:r>
+          </a:p>
+        </p:txBody>
+      </p:sp>
+    </p:spTree>
+    <p:extLst>
+      <p:ext uri="{BB962C8B-B14F-4D97-AF65-F5344CB8AC3E}">
+        <p14:creationId xmlns:p14="http://schemas.microsoft.com/office/powerpoint/2010/main" val="734405900"/>
+      </p:ext>
+    </p:extLst>
+  </p:cSld>
+  <p:clrMapOvr>
+    <a:masterClrMapping/>
+  </p:clrMapOvr>
+</p:sld>
+</file>
+
+<file path=ppt/slides/slide15.xml><?xml version="1.0" encoding="utf-8"?>
+<p:sld xmlns:a="http://schemas.openxmlformats.org/drawingml/2006/main" xmlns:r="http://schemas.openxmlformats.org/officeDocument/2006/relationships" xmlns:p="http://schemas.openxmlformats.org/presentationml/2006/main">
+  <p:cSld>
+    <p:spTree>
+      <p:nvGrpSpPr>
+        <p:cNvPr id="1" name=""/>
+        <p:cNvGrpSpPr/>
+        <p:nvPr/>
+      </p:nvGrpSpPr>
+      <p:grpSpPr>
+        <a:xfrm>
+          <a:off x="0" y="0"/>
+          <a:ext cx="0" cy="0"/>
+          <a:chOff x="0" y="0"/>
+          <a:chExt cx="0" cy="0"/>
+        </a:xfrm>
+      </p:grpSpPr>
+    </p:spTree>
+    <p:extLst>
+      <p:ext uri="{BB962C8B-B14F-4D97-AF65-F5344CB8AC3E}">
+        <p14:creationId xmlns:p14="http://schemas.microsoft.com/office/powerpoint/2010/main" val="3166843967"/>
+      </p:ext>
+    </p:extLst>
+  </p:cSld>
+  <p:clrMapOvr>
+    <a:masterClrMapping/>
+  </p:clrMapOvr>
+</p:sld>
+</file>
+
 <file path=ppt/slides/slide2.xml><?xml version="1.0" encoding="utf-8"?>
 <p:sld xmlns:a="http://schemas.openxmlformats.org/drawingml/2006/main" xmlns:r="http://schemas.openxmlformats.org/officeDocument/2006/relationships" xmlns:p="http://schemas.openxmlformats.org/presentationml/2006/main">
   <p:cSld>
@@ -3897,6 +4462,126 @@
     <p:extLst>
       <p:ext uri="{BB962C8B-B14F-4D97-AF65-F5344CB8AC3E}">
         <p14:creationId xmlns:p14="http://schemas.microsoft.com/office/powerpoint/2010/main" val="165184747"/>
+      </p:ext>
+    </p:extLst>
+  </p:cSld>
+  <p:clrMapOvr>
+    <a:masterClrMapping/>
+  </p:clrMapOvr>
+</p:sld>
+</file>
+
+<file path=ppt/slides/slide8.xml><?xml version="1.0" encoding="utf-8"?>
+<p:sld xmlns:a="http://schemas.openxmlformats.org/drawingml/2006/main" xmlns:r="http://schemas.openxmlformats.org/officeDocument/2006/relationships" xmlns:p="http://schemas.openxmlformats.org/presentationml/2006/main">
+  <p:cSld>
+    <p:spTree>
+      <p:nvGrpSpPr>
+        <p:cNvPr id="1" name=""/>
+        <p:cNvGrpSpPr/>
+        <p:nvPr/>
+      </p:nvGrpSpPr>
+      <p:grpSpPr>
+        <a:xfrm>
+          <a:off x="0" y="0"/>
+          <a:ext cx="0" cy="0"/>
+          <a:chOff x="0" y="0"/>
+          <a:chExt cx="0" cy="0"/>
+        </a:xfrm>
+      </p:grpSpPr>
+      <p:pic>
+        <p:nvPicPr>
+          <p:cNvPr id="3" name="Picture 2">
+            <a:extLst>
+              <a:ext uri="{FF2B5EF4-FFF2-40B4-BE49-F238E27FC236}">
+                <a16:creationId xmlns:a16="http://schemas.microsoft.com/office/drawing/2014/main" id="{38244C39-CFE7-DAE4-21B2-6692F14C06C5}"/>
+              </a:ext>
+            </a:extLst>
+          </p:cNvPr>
+          <p:cNvPicPr>
+            <a:picLocks noChangeAspect="1"/>
+          </p:cNvPicPr>
+          <p:nvPr/>
+        </p:nvPicPr>
+        <p:blipFill>
+          <a:blip r:embed="rId2"/>
+          <a:stretch>
+            <a:fillRect/>
+          </a:stretch>
+        </p:blipFill>
+        <p:spPr>
+          <a:xfrm>
+            <a:off x="4616674" y="0"/>
+            <a:ext cx="7575326" cy="6858000"/>
+          </a:xfrm>
+          <a:prstGeom prst="rect">
+            <a:avLst/>
+          </a:prstGeom>
+        </p:spPr>
+      </p:pic>
+    </p:spTree>
+    <p:extLst>
+      <p:ext uri="{BB962C8B-B14F-4D97-AF65-F5344CB8AC3E}">
+        <p14:creationId xmlns:p14="http://schemas.microsoft.com/office/powerpoint/2010/main" val="1065775927"/>
+      </p:ext>
+    </p:extLst>
+  </p:cSld>
+  <p:clrMapOvr>
+    <a:masterClrMapping/>
+  </p:clrMapOvr>
+</p:sld>
+</file>
+
+<file path=ppt/slides/slide9.xml><?xml version="1.0" encoding="utf-8"?>
+<p:sld xmlns:a="http://schemas.openxmlformats.org/drawingml/2006/main" xmlns:r="http://schemas.openxmlformats.org/officeDocument/2006/relationships" xmlns:p="http://schemas.openxmlformats.org/presentationml/2006/main">
+  <p:cSld>
+    <p:spTree>
+      <p:nvGrpSpPr>
+        <p:cNvPr id="1" name=""/>
+        <p:cNvGrpSpPr/>
+        <p:nvPr/>
+      </p:nvGrpSpPr>
+      <p:grpSpPr>
+        <a:xfrm>
+          <a:off x="0" y="0"/>
+          <a:ext cx="0" cy="0"/>
+          <a:chOff x="0" y="0"/>
+          <a:chExt cx="0" cy="0"/>
+        </a:xfrm>
+      </p:grpSpPr>
+      <p:pic>
+        <p:nvPicPr>
+          <p:cNvPr id="3" name="Picture 2">
+            <a:extLst>
+              <a:ext uri="{FF2B5EF4-FFF2-40B4-BE49-F238E27FC236}">
+                <a16:creationId xmlns:a16="http://schemas.microsoft.com/office/drawing/2014/main" id="{57E80A0D-EA2A-89E2-BAE6-C05189D58521}"/>
+              </a:ext>
+            </a:extLst>
+          </p:cNvPr>
+          <p:cNvPicPr>
+            <a:picLocks noChangeAspect="1"/>
+          </p:cNvPicPr>
+          <p:nvPr/>
+        </p:nvPicPr>
+        <p:blipFill>
+          <a:blip r:embed="rId2"/>
+          <a:stretch>
+            <a:fillRect/>
+          </a:stretch>
+        </p:blipFill>
+        <p:spPr>
+          <a:xfrm>
+            <a:off x="4616674" y="0"/>
+            <a:ext cx="7575326" cy="6858000"/>
+          </a:xfrm>
+          <a:prstGeom prst="rect">
+            <a:avLst/>
+          </a:prstGeom>
+        </p:spPr>
+      </p:pic>
+    </p:spTree>
+    <p:extLst>
+      <p:ext uri="{BB962C8B-B14F-4D97-AF65-F5344CB8AC3E}">
+        <p14:creationId xmlns:p14="http://schemas.microsoft.com/office/powerpoint/2010/main" val="2630786682"/>
       </p:ext>
     </p:extLst>
   </p:cSld>

--- a/References/ProjectSnaps.pptx
+++ b/References/ProjectSnaps.pptx
@@ -20,6 +20,9 @@
     <p:sldId id="268" r:id="rId14"/>
     <p:sldId id="269" r:id="rId15"/>
     <p:sldId id="270" r:id="rId16"/>
+    <p:sldId id="271" r:id="rId17"/>
+    <p:sldId id="272" r:id="rId18"/>
+    <p:sldId id="273" r:id="rId19"/>
   </p:sldIdLst>
   <p:sldSz cx="12192000" cy="6858000"/>
   <p:notesSz cx="6858000" cy="9144000"/>
@@ -4020,10 +4023,307 @@
           <a:chExt cx="0" cy="0"/>
         </a:xfrm>
       </p:grpSpPr>
+      <p:pic>
+        <p:nvPicPr>
+          <p:cNvPr id="3" name="Picture 2">
+            <a:extLst>
+              <a:ext uri="{FF2B5EF4-FFF2-40B4-BE49-F238E27FC236}">
+                <a16:creationId xmlns:a16="http://schemas.microsoft.com/office/drawing/2014/main" id="{D0BAF048-E1EA-CD54-061E-85C58DD3E732}"/>
+              </a:ext>
+            </a:extLst>
+          </p:cNvPr>
+          <p:cNvPicPr>
+            <a:picLocks noChangeAspect="1"/>
+          </p:cNvPicPr>
+          <p:nvPr/>
+        </p:nvPicPr>
+        <p:blipFill>
+          <a:blip r:embed="rId2"/>
+          <a:stretch>
+            <a:fillRect/>
+          </a:stretch>
+        </p:blipFill>
+        <p:spPr>
+          <a:xfrm>
+            <a:off x="4616674" y="0"/>
+            <a:ext cx="7575326" cy="6858000"/>
+          </a:xfrm>
+          <a:prstGeom prst="rect">
+            <a:avLst/>
+          </a:prstGeom>
+        </p:spPr>
+      </p:pic>
+      <p:sp>
+        <p:nvSpPr>
+          <p:cNvPr id="4" name="TextBox 3">
+            <a:extLst>
+              <a:ext uri="{FF2B5EF4-FFF2-40B4-BE49-F238E27FC236}">
+                <a16:creationId xmlns:a16="http://schemas.microsoft.com/office/drawing/2014/main" id="{E4B5D688-0D98-1401-78D2-7516057BA2C5}"/>
+              </a:ext>
+            </a:extLst>
+          </p:cNvPr>
+          <p:cNvSpPr txBox="1"/>
+          <p:nvPr/>
+        </p:nvSpPr>
+        <p:spPr>
+          <a:xfrm>
+            <a:off x="79843" y="492370"/>
+            <a:ext cx="4536831" cy="3139321"/>
+          </a:xfrm>
+          <a:prstGeom prst="rect">
+            <a:avLst/>
+          </a:prstGeom>
+          <a:noFill/>
+        </p:spPr>
+        <p:txBody>
+          <a:bodyPr wrap="square" rtlCol="0">
+            <a:spAutoFit/>
+          </a:bodyPr>
+          <a:lstStyle/>
+          <a:p>
+            <a:r>
+              <a:rPr lang="en-US" dirty="0"/>
+              <a:t>Authorize GitHub</a:t>
+            </a:r>
+          </a:p>
+          <a:p>
+            <a:r>
+              <a:rPr lang="en-US" dirty="0"/>
+              <a:t>App Service will place a GitHub Actions workflow in your chosen repository to build and deploy your app whenever there is a commit on the chosen branch. If you can't find an organization or repository, you may need to enable additional permissions on GitHub. You must have write access to your chosen GitHub repository to deploy with GitHub Actions.</a:t>
+            </a:r>
+            <a:br>
+              <a:rPr lang="en-US" dirty="0">
+                <a:hlinkClick r:id="rId3"/>
+              </a:rPr>
+            </a:br>
+            <a:endParaRPr lang="en-US" dirty="0"/>
+          </a:p>
+        </p:txBody>
+      </p:sp>
     </p:spTree>
     <p:extLst>
       <p:ext uri="{BB962C8B-B14F-4D97-AF65-F5344CB8AC3E}">
         <p14:creationId xmlns:p14="http://schemas.microsoft.com/office/powerpoint/2010/main" val="3166843967"/>
+      </p:ext>
+    </p:extLst>
+  </p:cSld>
+  <p:clrMapOvr>
+    <a:masterClrMapping/>
+  </p:clrMapOvr>
+</p:sld>
+</file>
+
+<file path=ppt/slides/slide16.xml><?xml version="1.0" encoding="utf-8"?>
+<p:sld xmlns:a="http://schemas.openxmlformats.org/drawingml/2006/main" xmlns:r="http://schemas.openxmlformats.org/officeDocument/2006/relationships" xmlns:p="http://schemas.openxmlformats.org/presentationml/2006/main">
+  <p:cSld>
+    <p:spTree>
+      <p:nvGrpSpPr>
+        <p:cNvPr id="1" name=""/>
+        <p:cNvGrpSpPr/>
+        <p:nvPr/>
+      </p:nvGrpSpPr>
+      <p:grpSpPr>
+        <a:xfrm>
+          <a:off x="0" y="0"/>
+          <a:ext cx="0" cy="0"/>
+          <a:chOff x="0" y="0"/>
+          <a:chExt cx="0" cy="0"/>
+        </a:xfrm>
+      </p:grpSpPr>
+      <p:pic>
+        <p:nvPicPr>
+          <p:cNvPr id="3" name="Picture 2">
+            <a:extLst>
+              <a:ext uri="{FF2B5EF4-FFF2-40B4-BE49-F238E27FC236}">
+                <a16:creationId xmlns:a16="http://schemas.microsoft.com/office/drawing/2014/main" id="{7EBFAD50-FD5C-8D6A-6B06-37D770AB632F}"/>
+              </a:ext>
+            </a:extLst>
+          </p:cNvPr>
+          <p:cNvPicPr>
+            <a:picLocks noChangeAspect="1"/>
+          </p:cNvPicPr>
+          <p:nvPr/>
+        </p:nvPicPr>
+        <p:blipFill>
+          <a:blip r:embed="rId2"/>
+          <a:stretch>
+            <a:fillRect/>
+          </a:stretch>
+        </p:blipFill>
+        <p:spPr>
+          <a:xfrm>
+            <a:off x="0" y="685483"/>
+            <a:ext cx="12192000" cy="5487034"/>
+          </a:xfrm>
+          <a:prstGeom prst="rect">
+            <a:avLst/>
+          </a:prstGeom>
+        </p:spPr>
+      </p:pic>
+    </p:spTree>
+    <p:extLst>
+      <p:ext uri="{BB962C8B-B14F-4D97-AF65-F5344CB8AC3E}">
+        <p14:creationId xmlns:p14="http://schemas.microsoft.com/office/powerpoint/2010/main" val="3941072156"/>
+      </p:ext>
+    </p:extLst>
+  </p:cSld>
+  <p:clrMapOvr>
+    <a:masterClrMapping/>
+  </p:clrMapOvr>
+</p:sld>
+</file>
+
+<file path=ppt/slides/slide17.xml><?xml version="1.0" encoding="utf-8"?>
+<p:sld xmlns:a="http://schemas.openxmlformats.org/drawingml/2006/main" xmlns:r="http://schemas.openxmlformats.org/officeDocument/2006/relationships" xmlns:p="http://schemas.openxmlformats.org/presentationml/2006/main">
+  <p:cSld>
+    <p:spTree>
+      <p:nvGrpSpPr>
+        <p:cNvPr id="1" name=""/>
+        <p:cNvGrpSpPr/>
+        <p:nvPr/>
+      </p:nvGrpSpPr>
+      <p:grpSpPr>
+        <a:xfrm>
+          <a:off x="0" y="0"/>
+          <a:ext cx="0" cy="0"/>
+          <a:chOff x="0" y="0"/>
+          <a:chExt cx="0" cy="0"/>
+        </a:xfrm>
+      </p:grpSpPr>
+      <p:pic>
+        <p:nvPicPr>
+          <p:cNvPr id="3" name="Picture 2">
+            <a:extLst>
+              <a:ext uri="{FF2B5EF4-FFF2-40B4-BE49-F238E27FC236}">
+                <a16:creationId xmlns:a16="http://schemas.microsoft.com/office/drawing/2014/main" id="{BC67BBB8-8A93-89BC-0D2C-D1D52E50192D}"/>
+              </a:ext>
+            </a:extLst>
+          </p:cNvPr>
+          <p:cNvPicPr>
+            <a:picLocks noChangeAspect="1"/>
+          </p:cNvPicPr>
+          <p:nvPr/>
+        </p:nvPicPr>
+        <p:blipFill>
+          <a:blip r:embed="rId2"/>
+          <a:stretch>
+            <a:fillRect/>
+          </a:stretch>
+        </p:blipFill>
+        <p:spPr>
+          <a:xfrm>
+            <a:off x="4616674" y="0"/>
+            <a:ext cx="7575326" cy="6858000"/>
+          </a:xfrm>
+          <a:prstGeom prst="rect">
+            <a:avLst/>
+          </a:prstGeom>
+        </p:spPr>
+      </p:pic>
+      <p:sp>
+        <p:nvSpPr>
+          <p:cNvPr id="4" name="TextBox 3">
+            <a:extLst>
+              <a:ext uri="{FF2B5EF4-FFF2-40B4-BE49-F238E27FC236}">
+                <a16:creationId xmlns:a16="http://schemas.microsoft.com/office/drawing/2014/main" id="{1F5FAEA7-2694-3CFD-FE88-5C2BE935249E}"/>
+              </a:ext>
+            </a:extLst>
+          </p:cNvPr>
+          <p:cNvSpPr txBox="1"/>
+          <p:nvPr/>
+        </p:nvSpPr>
+        <p:spPr>
+          <a:xfrm>
+            <a:off x="923192" y="606669"/>
+            <a:ext cx="2400300" cy="369332"/>
+          </a:xfrm>
+          <a:prstGeom prst="rect">
+            <a:avLst/>
+          </a:prstGeom>
+          <a:noFill/>
+        </p:spPr>
+        <p:txBody>
+          <a:bodyPr wrap="square" rtlCol="0">
+            <a:spAutoFit/>
+          </a:bodyPr>
+          <a:lstStyle/>
+          <a:p>
+            <a:r>
+              <a:rPr lang="en-US" dirty="0"/>
+              <a:t>Finishing GitHub auth</a:t>
+            </a:r>
+          </a:p>
+        </p:txBody>
+      </p:sp>
+    </p:spTree>
+    <p:extLst>
+      <p:ext uri="{BB962C8B-B14F-4D97-AF65-F5344CB8AC3E}">
+        <p14:creationId xmlns:p14="http://schemas.microsoft.com/office/powerpoint/2010/main" val="504004102"/>
+      </p:ext>
+    </p:extLst>
+  </p:cSld>
+  <p:clrMapOvr>
+    <a:masterClrMapping/>
+  </p:clrMapOvr>
+</p:sld>
+</file>
+
+<file path=ppt/slides/slide18.xml><?xml version="1.0" encoding="utf-8"?>
+<p:sld xmlns:a="http://schemas.openxmlformats.org/drawingml/2006/main" xmlns:r="http://schemas.openxmlformats.org/officeDocument/2006/relationships" xmlns:p="http://schemas.openxmlformats.org/presentationml/2006/main">
+  <p:cSld>
+    <p:spTree>
+      <p:nvGrpSpPr>
+        <p:cNvPr id="1" name=""/>
+        <p:cNvGrpSpPr/>
+        <p:nvPr/>
+      </p:nvGrpSpPr>
+      <p:grpSpPr>
+        <a:xfrm>
+          <a:off x="0" y="0"/>
+          <a:ext cx="0" cy="0"/>
+          <a:chOff x="0" y="0"/>
+          <a:chExt cx="0" cy="0"/>
+        </a:xfrm>
+      </p:grpSpPr>
+      <p:sp>
+        <p:nvSpPr>
+          <p:cNvPr id="2" name="TextBox 1">
+            <a:extLst>
+              <a:ext uri="{FF2B5EF4-FFF2-40B4-BE49-F238E27FC236}">
+                <a16:creationId xmlns:a16="http://schemas.microsoft.com/office/drawing/2014/main" id="{5C563D94-AEF0-25D6-1948-F1E9BAC0FEDD}"/>
+              </a:ext>
+            </a:extLst>
+          </p:cNvPr>
+          <p:cNvSpPr txBox="1"/>
+          <p:nvPr/>
+        </p:nvSpPr>
+        <p:spPr>
+          <a:xfrm>
+            <a:off x="1028700" y="1195754"/>
+            <a:ext cx="2268415" cy="369332"/>
+          </a:xfrm>
+          <a:prstGeom prst="rect">
+            <a:avLst/>
+          </a:prstGeom>
+          <a:noFill/>
+        </p:spPr>
+        <p:txBody>
+          <a:bodyPr wrap="square" rtlCol="0">
+            <a:spAutoFit/>
+          </a:bodyPr>
+          <a:lstStyle/>
+          <a:p>
+            <a:r>
+              <a:rPr lang="en-US"/>
+              <a:t>sadf</a:t>
+            </a:r>
+          </a:p>
+        </p:txBody>
+      </p:sp>
+    </p:spTree>
+    <p:extLst>
+      <p:ext uri="{BB962C8B-B14F-4D97-AF65-F5344CB8AC3E}">
+        <p14:creationId xmlns:p14="http://schemas.microsoft.com/office/powerpoint/2010/main" val="620128126"/>
       </p:ext>
     </p:extLst>
   </p:cSld>

--- a/References/ProjectSnaps.pptx
+++ b/References/ProjectSnaps.pptx
@@ -21,8 +21,14 @@
     <p:sldId id="269" r:id="rId15"/>
     <p:sldId id="270" r:id="rId16"/>
     <p:sldId id="271" r:id="rId17"/>
-    <p:sldId id="272" r:id="rId18"/>
-    <p:sldId id="273" r:id="rId19"/>
+    <p:sldId id="275" r:id="rId18"/>
+    <p:sldId id="276" r:id="rId19"/>
+    <p:sldId id="272" r:id="rId20"/>
+    <p:sldId id="273" r:id="rId21"/>
+    <p:sldId id="274" r:id="rId22"/>
+    <p:sldId id="277" r:id="rId23"/>
+    <p:sldId id="278" r:id="rId24"/>
+    <p:sldId id="279" r:id="rId25"/>
   </p:sldIdLst>
   <p:sldSz cx="12192000" cy="6858000"/>
   <p:notesSz cx="6858000" cy="9144000"/>
@@ -328,7 +334,7 @@
           <a:p>
             <a:fld id="{7DEE96FE-DC9C-4536-9FF4-6BA93424ACA5}" type="datetimeFigureOut">
               <a:rPr lang="en-US" smtClean="0"/>
-              <a:t>2/28/2026</a:t>
+              <a:t>3/2/2026</a:t>
             </a:fld>
             <a:endParaRPr lang="en-US"/>
           </a:p>
@@ -526,7 +532,7 @@
           <a:p>
             <a:fld id="{7DEE96FE-DC9C-4536-9FF4-6BA93424ACA5}" type="datetimeFigureOut">
               <a:rPr lang="en-US" smtClean="0"/>
-              <a:t>2/28/2026</a:t>
+              <a:t>3/2/2026</a:t>
             </a:fld>
             <a:endParaRPr lang="en-US"/>
           </a:p>
@@ -734,7 +740,7 @@
           <a:p>
             <a:fld id="{7DEE96FE-DC9C-4536-9FF4-6BA93424ACA5}" type="datetimeFigureOut">
               <a:rPr lang="en-US" smtClean="0"/>
-              <a:t>2/28/2026</a:t>
+              <a:t>3/2/2026</a:t>
             </a:fld>
             <a:endParaRPr lang="en-US"/>
           </a:p>
@@ -932,7 +938,7 @@
           <a:p>
             <a:fld id="{7DEE96FE-DC9C-4536-9FF4-6BA93424ACA5}" type="datetimeFigureOut">
               <a:rPr lang="en-US" smtClean="0"/>
-              <a:t>2/28/2026</a:t>
+              <a:t>3/2/2026</a:t>
             </a:fld>
             <a:endParaRPr lang="en-US"/>
           </a:p>
@@ -1207,7 +1213,7 @@
           <a:p>
             <a:fld id="{7DEE96FE-DC9C-4536-9FF4-6BA93424ACA5}" type="datetimeFigureOut">
               <a:rPr lang="en-US" smtClean="0"/>
-              <a:t>2/28/2026</a:t>
+              <a:t>3/2/2026</a:t>
             </a:fld>
             <a:endParaRPr lang="en-US"/>
           </a:p>
@@ -1472,7 +1478,7 @@
           <a:p>
             <a:fld id="{7DEE96FE-DC9C-4536-9FF4-6BA93424ACA5}" type="datetimeFigureOut">
               <a:rPr lang="en-US" smtClean="0"/>
-              <a:t>2/28/2026</a:t>
+              <a:t>3/2/2026</a:t>
             </a:fld>
             <a:endParaRPr lang="en-US"/>
           </a:p>
@@ -1884,7 +1890,7 @@
           <a:p>
             <a:fld id="{7DEE96FE-DC9C-4536-9FF4-6BA93424ACA5}" type="datetimeFigureOut">
               <a:rPr lang="en-US" smtClean="0"/>
-              <a:t>2/28/2026</a:t>
+              <a:t>3/2/2026</a:t>
             </a:fld>
             <a:endParaRPr lang="en-US"/>
           </a:p>
@@ -2025,7 +2031,7 @@
           <a:p>
             <a:fld id="{7DEE96FE-DC9C-4536-9FF4-6BA93424ACA5}" type="datetimeFigureOut">
               <a:rPr lang="en-US" smtClean="0"/>
-              <a:t>2/28/2026</a:t>
+              <a:t>3/2/2026</a:t>
             </a:fld>
             <a:endParaRPr lang="en-US"/>
           </a:p>
@@ -2138,7 +2144,7 @@
           <a:p>
             <a:fld id="{7DEE96FE-DC9C-4536-9FF4-6BA93424ACA5}" type="datetimeFigureOut">
               <a:rPr lang="en-US" smtClean="0"/>
-              <a:t>2/28/2026</a:t>
+              <a:t>3/2/2026</a:t>
             </a:fld>
             <a:endParaRPr lang="en-US"/>
           </a:p>
@@ -2449,7 +2455,7 @@
           <a:p>
             <a:fld id="{7DEE96FE-DC9C-4536-9FF4-6BA93424ACA5}" type="datetimeFigureOut">
               <a:rPr lang="en-US" smtClean="0"/>
-              <a:t>2/28/2026</a:t>
+              <a:t>3/2/2026</a:t>
             </a:fld>
             <a:endParaRPr lang="en-US"/>
           </a:p>
@@ -2737,7 +2743,7 @@
           <a:p>
             <a:fld id="{7DEE96FE-DC9C-4536-9FF4-6BA93424ACA5}" type="datetimeFigureOut">
               <a:rPr lang="en-US" smtClean="0"/>
-              <a:t>2/28/2026</a:t>
+              <a:t>3/2/2026</a:t>
             </a:fld>
             <a:endParaRPr lang="en-US"/>
           </a:p>
@@ -2978,7 +2984,7 @@
           <a:p>
             <a:fld id="{7DEE96FE-DC9C-4536-9FF4-6BA93424ACA5}" type="datetimeFigureOut">
               <a:rPr lang="en-US" smtClean="0"/>
-              <a:t>2/28/2026</a:t>
+              <a:t>3/2/2026</a:t>
             </a:fld>
             <a:endParaRPr lang="en-US"/>
           </a:p>
@@ -4190,42 +4196,1316 @@
           <a:chExt cx="0" cy="0"/>
         </a:xfrm>
       </p:grpSpPr>
-      <p:pic>
-        <p:nvPicPr>
-          <p:cNvPr id="3" name="Picture 2">
-            <a:extLst>
-              <a:ext uri="{FF2B5EF4-FFF2-40B4-BE49-F238E27FC236}">
-                <a16:creationId xmlns:a16="http://schemas.microsoft.com/office/drawing/2014/main" id="{BC67BBB8-8A93-89BC-0D2C-D1D52E50192D}"/>
-              </a:ext>
-            </a:extLst>
-          </p:cNvPr>
-          <p:cNvPicPr>
-            <a:picLocks noChangeAspect="1"/>
-          </p:cNvPicPr>
+      <p:sp>
+        <p:nvSpPr>
+          <p:cNvPr id="15" name="TextBox 14">
+            <a:extLst>
+              <a:ext uri="{FF2B5EF4-FFF2-40B4-BE49-F238E27FC236}">
+                <a16:creationId xmlns:a16="http://schemas.microsoft.com/office/drawing/2014/main" id="{BB83FB47-47D2-6BF5-E3A9-277E380FCF68}"/>
+              </a:ext>
+            </a:extLst>
+          </p:cNvPr>
+          <p:cNvSpPr txBox="1"/>
           <p:nvPr/>
-        </p:nvPicPr>
-        <p:blipFill>
-          <a:blip r:embed="rId2"/>
-          <a:stretch>
-            <a:fillRect/>
-          </a:stretch>
-        </p:blipFill>
+        </p:nvSpPr>
         <p:spPr>
           <a:xfrm>
-            <a:off x="4616674" y="0"/>
-            <a:ext cx="7575326" cy="6858000"/>
+            <a:off x="1872762" y="1143000"/>
+            <a:ext cx="9645161" cy="2699238"/>
           </a:xfrm>
           <a:prstGeom prst="rect">
             <a:avLst/>
           </a:prstGeom>
+          <a:noFill/>
         </p:spPr>
-      </p:pic>
+        <p:txBody>
+          <a:bodyPr wrap="square" rtlCol="0">
+            <a:normAutofit/>
+          </a:bodyPr>
+          <a:lstStyle/>
+          <a:p>
+            <a:endParaRPr lang="en-US" dirty="0"/>
+          </a:p>
+        </p:txBody>
+      </p:sp>
+      <p:graphicFrame>
+        <p:nvGraphicFramePr>
+          <p:cNvPr id="36" name="Table 35">
+            <a:extLst>
+              <a:ext uri="{FF2B5EF4-FFF2-40B4-BE49-F238E27FC236}">
+                <a16:creationId xmlns:a16="http://schemas.microsoft.com/office/drawing/2014/main" id="{754D32CF-E80F-AB21-CCED-3D5004A8F81B}"/>
+              </a:ext>
+            </a:extLst>
+          </p:cNvPr>
+          <p:cNvGraphicFramePr>
+            <a:graphicFrameLocks noGrp="1"/>
+          </p:cNvGraphicFramePr>
+          <p:nvPr>
+            <p:extLst>
+              <p:ext uri="{D42A27DB-BD31-4B8C-83A1-F6EECF244321}">
+                <p14:modId xmlns:p14="http://schemas.microsoft.com/office/powerpoint/2010/main" val="3660533112"/>
+              </p:ext>
+            </p:extLst>
+          </p:nvPr>
+        </p:nvGraphicFramePr>
+        <p:xfrm>
+          <a:off x="4217577" y="190322"/>
+          <a:ext cx="5985120" cy="4466367"/>
+        </p:xfrm>
+        <a:graphic>
+          <a:graphicData uri="http://schemas.openxmlformats.org/drawingml/2006/table">
+            <a:tbl>
+              <a:tblPr/>
+              <a:tblGrid>
+                <a:gridCol w="1995040">
+                  <a:extLst>
+                    <a:ext uri="{9D8B030D-6E8A-4147-A177-3AD203B41FA5}">
+                      <a16:colId xmlns:a16="http://schemas.microsoft.com/office/drawing/2014/main" val="1740388689"/>
+                    </a:ext>
+                  </a:extLst>
+                </a:gridCol>
+                <a:gridCol w="1995040">
+                  <a:extLst>
+                    <a:ext uri="{9D8B030D-6E8A-4147-A177-3AD203B41FA5}">
+                      <a16:colId xmlns:a16="http://schemas.microsoft.com/office/drawing/2014/main" val="1669210002"/>
+                    </a:ext>
+                  </a:extLst>
+                </a:gridCol>
+                <a:gridCol w="1995040">
+                  <a:extLst>
+                    <a:ext uri="{9D8B030D-6E8A-4147-A177-3AD203B41FA5}">
+                      <a16:colId xmlns:a16="http://schemas.microsoft.com/office/drawing/2014/main" val="187599189"/>
+                    </a:ext>
+                  </a:extLst>
+                </a:gridCol>
+              </a:tblGrid>
+              <a:tr h="175432">
+                <a:tc>
+                  <a:txBody>
+                    <a:bodyPr/>
+                    <a:lstStyle/>
+                    <a:p>
+                      <a:pPr algn="l" fontAlgn="t">
+                        <a:buNone/>
+                      </a:pPr>
+                      <a:r>
+                        <a:rPr lang="en-US" sz="700" b="0">
+                          <a:solidFill>
+                            <a:srgbClr val="FFFFFF"/>
+                          </a:solidFill>
+                          <a:effectLst/>
+                        </a:rPr>
+                        <a:t>Step</a:t>
+                      </a:r>
+                    </a:p>
+                  </a:txBody>
+                  <a:tcPr marL="31327" marR="31327" marT="31327" marB="31327">
+                    <a:lnL>
+                      <a:noFill/>
+                    </a:lnL>
+                    <a:lnR>
+                      <a:noFill/>
+                    </a:lnR>
+                    <a:lnT>
+                      <a:noFill/>
+                    </a:lnT>
+                    <a:lnB w="9525" cap="flat" cmpd="sng" algn="ctr">
+                      <a:solidFill>
+                        <a:srgbClr val="444746"/>
+                      </a:solidFill>
+                      <a:prstDash val="solid"/>
+                      <a:round/>
+                      <a:headEnd type="none" w="med" len="med"/>
+                      <a:tailEnd type="none" w="med" len="med"/>
+                    </a:lnB>
+                    <a:solidFill>
+                      <a:srgbClr val="131314"/>
+                    </a:solidFill>
+                  </a:tcPr>
+                </a:tc>
+                <a:tc>
+                  <a:txBody>
+                    <a:bodyPr/>
+                    <a:lstStyle/>
+                    <a:p>
+                      <a:pPr algn="l" fontAlgn="t">
+                        <a:buNone/>
+                      </a:pPr>
+                      <a:r>
+                        <a:rPr lang="en-US" sz="700" b="0">
+                          <a:solidFill>
+                            <a:srgbClr val="FFFFFF"/>
+                          </a:solidFill>
+                          <a:effectLst/>
+                        </a:rPr>
+                        <a:t>Action</a:t>
+                      </a:r>
+                    </a:p>
+                  </a:txBody>
+                  <a:tcPr marL="31327" marR="31327" marT="31327" marB="31327">
+                    <a:lnL>
+                      <a:noFill/>
+                    </a:lnL>
+                    <a:lnR>
+                      <a:noFill/>
+                    </a:lnR>
+                    <a:lnT>
+                      <a:noFill/>
+                    </a:lnT>
+                    <a:lnB w="9525" cap="flat" cmpd="sng" algn="ctr">
+                      <a:solidFill>
+                        <a:srgbClr val="444746"/>
+                      </a:solidFill>
+                      <a:prstDash val="solid"/>
+                      <a:round/>
+                      <a:headEnd type="none" w="med" len="med"/>
+                      <a:tailEnd type="none" w="med" len="med"/>
+                    </a:lnB>
+                    <a:solidFill>
+                      <a:srgbClr val="131314"/>
+                    </a:solidFill>
+                  </a:tcPr>
+                </a:tc>
+                <a:tc>
+                  <a:txBody>
+                    <a:bodyPr/>
+                    <a:lstStyle/>
+                    <a:p>
+                      <a:pPr algn="l" fontAlgn="t">
+                        <a:buNone/>
+                      </a:pPr>
+                      <a:r>
+                        <a:rPr lang="en-US" sz="700" b="0">
+                          <a:solidFill>
+                            <a:srgbClr val="FFFFFF"/>
+                          </a:solidFill>
+                          <a:effectLst/>
+                        </a:rPr>
+                        <a:t>Details</a:t>
+                      </a:r>
+                    </a:p>
+                  </a:txBody>
+                  <a:tcPr marL="31327" marR="31327" marT="31327" marB="31327">
+                    <a:lnL>
+                      <a:noFill/>
+                    </a:lnL>
+                    <a:lnR>
+                      <a:noFill/>
+                    </a:lnR>
+                    <a:lnT>
+                      <a:noFill/>
+                    </a:lnT>
+                    <a:lnB w="9525" cap="flat" cmpd="sng" algn="ctr">
+                      <a:solidFill>
+                        <a:srgbClr val="444746"/>
+                      </a:solidFill>
+                      <a:prstDash val="solid"/>
+                      <a:round/>
+                      <a:headEnd type="none" w="med" len="med"/>
+                      <a:tailEnd type="none" w="med" len="med"/>
+                    </a:lnB>
+                    <a:solidFill>
+                      <a:srgbClr val="131314"/>
+                    </a:solidFill>
+                  </a:tcPr>
+                </a:tc>
+                <a:extLst>
+                  <a:ext uri="{0D108BD9-81ED-4DB2-BD59-A6C34878D82A}">
+                    <a16:rowId xmlns:a16="http://schemas.microsoft.com/office/drawing/2014/main" val="3409849585"/>
+                  </a:ext>
+                </a:extLst>
+              </a:tr>
+              <a:tr h="913186">
+                <a:tc>
+                  <a:txBody>
+                    <a:bodyPr/>
+                    <a:lstStyle/>
+                    <a:p>
+                      <a:pPr algn="l" fontAlgn="t">
+                        <a:buNone/>
+                      </a:pPr>
+                      <a:r>
+                        <a:rPr lang="en-US" sz="700" b="0">
+                          <a:solidFill>
+                            <a:srgbClr val="FFFFFF"/>
+                          </a:solidFill>
+                          <a:effectLst/>
+                          <a:latin typeface="Google Sans Text"/>
+                        </a:rPr>
+                        <a:t>1. Download the Publish Profile</a:t>
+                      </a:r>
+                      <a:endParaRPr lang="en-US" sz="700">
+                        <a:solidFill>
+                          <a:srgbClr val="FFFFFF"/>
+                        </a:solidFill>
+                        <a:effectLst/>
+                      </a:endParaRPr>
+                    </a:p>
+                  </a:txBody>
+                  <a:tcPr marL="31327" marR="31327" marT="31327" marB="31327">
+                    <a:lnL>
+                      <a:noFill/>
+                    </a:lnL>
+                    <a:lnR>
+                      <a:noFill/>
+                    </a:lnR>
+                    <a:lnT w="9525" cap="flat" cmpd="sng" algn="ctr">
+                      <a:solidFill>
+                        <a:srgbClr val="444746"/>
+                      </a:solidFill>
+                      <a:prstDash val="solid"/>
+                      <a:round/>
+                      <a:headEnd type="none" w="med" len="med"/>
+                      <a:tailEnd type="none" w="med" len="med"/>
+                    </a:lnT>
+                    <a:lnB w="9525" cap="flat" cmpd="sng" algn="ctr">
+                      <a:solidFill>
+                        <a:srgbClr val="444746"/>
+                      </a:solidFill>
+                      <a:prstDash val="solid"/>
+                      <a:round/>
+                      <a:headEnd type="none" w="med" len="med"/>
+                      <a:tailEnd type="none" w="med" len="med"/>
+                    </a:lnB>
+                    <a:solidFill>
+                      <a:srgbClr val="131314"/>
+                    </a:solidFill>
+                  </a:tcPr>
+                </a:tc>
+                <a:tc>
+                  <a:txBody>
+                    <a:bodyPr/>
+                    <a:lstStyle/>
+                    <a:p>
+                      <a:pPr algn="l" fontAlgn="t">
+                        <a:lnSpc>
+                          <a:spcPts val="1800"/>
+                        </a:lnSpc>
+                        <a:buNone/>
+                      </a:pPr>
+                      <a:r>
+                        <a:rPr lang="en-US" sz="700">
+                          <a:solidFill>
+                            <a:srgbClr val="FFFFFF"/>
+                          </a:solidFill>
+                          <a:effectLst/>
+                        </a:rPr>
+                        <a:t>Go to the </a:t>
+                      </a:r>
+                      <a:r>
+                        <a:rPr lang="en-US" sz="700" b="0" u="none" strike="noStrike">
+                          <a:solidFill>
+                            <a:srgbClr val="A8C7FA"/>
+                          </a:solidFill>
+                          <a:effectLst/>
+                          <a:latin typeface="Google Sans Text"/>
+                          <a:hlinkClick r:id="rId2" tooltip="https://portal.azure.com"/>
+                        </a:rPr>
+                        <a:t>Azure Portal</a:t>
+                      </a:r>
+                      <a:r>
+                        <a:rPr lang="en-US" sz="700">
+                          <a:solidFill>
+                            <a:srgbClr val="FFFFFF"/>
+                          </a:solidFill>
+                          <a:effectLst/>
+                        </a:rPr>
+                        <a:t>. Navigate to your </a:t>
+                      </a:r>
+                      <a:r>
+                        <a:rPr lang="en-US" sz="700" b="0">
+                          <a:solidFill>
+                            <a:srgbClr val="FFFFFF"/>
+                          </a:solidFill>
+                          <a:effectLst/>
+                          <a:latin typeface="Google Sans Mono"/>
+                        </a:rPr>
+                        <a:t>dr-helpdesk-webapp</a:t>
+                      </a:r>
+                      <a:r>
+                        <a:rPr lang="en-US" sz="700">
+                          <a:solidFill>
+                            <a:srgbClr val="FFFFFF"/>
+                          </a:solidFill>
+                          <a:effectLst/>
+                        </a:rPr>
+                        <a:t> App Service. On its </a:t>
+                      </a:r>
+                      <a:r>
+                        <a:rPr lang="en-US" sz="700" b="0">
+                          <a:solidFill>
+                            <a:srgbClr val="FFFFFF"/>
+                          </a:solidFill>
+                          <a:effectLst/>
+                          <a:latin typeface="Google Sans Text"/>
+                        </a:rPr>
+                        <a:t>Overview</a:t>
+                      </a:r>
+                      <a:r>
+                        <a:rPr lang="en-US" sz="700">
+                          <a:solidFill>
+                            <a:srgbClr val="FFFFFF"/>
+                          </a:solidFill>
+                          <a:effectLst/>
+                        </a:rPr>
+                        <a:t> page, find and click the </a:t>
+                      </a:r>
+                      <a:r>
+                        <a:rPr lang="en-US" sz="700" b="0">
+                          <a:solidFill>
+                            <a:srgbClr val="FFFFFF"/>
+                          </a:solidFill>
+                          <a:effectLst/>
+                          <a:latin typeface="Google Sans Text"/>
+                        </a:rPr>
+                        <a:t>"Download publish profile"</a:t>
+                      </a:r>
+                      <a:r>
+                        <a:rPr lang="en-US" sz="700">
+                          <a:solidFill>
+                            <a:srgbClr val="FFFFFF"/>
+                          </a:solidFill>
+                          <a:effectLst/>
+                        </a:rPr>
+                        <a:t> button.</a:t>
+                      </a:r>
+                    </a:p>
+                  </a:txBody>
+                  <a:tcPr marL="31327" marR="31327" marT="31327" marB="31327">
+                    <a:lnL>
+                      <a:noFill/>
+                    </a:lnL>
+                    <a:lnR>
+                      <a:noFill/>
+                    </a:lnR>
+                    <a:lnT w="9525" cap="flat" cmpd="sng" algn="ctr">
+                      <a:solidFill>
+                        <a:srgbClr val="444746"/>
+                      </a:solidFill>
+                      <a:prstDash val="solid"/>
+                      <a:round/>
+                      <a:headEnd type="none" w="med" len="med"/>
+                      <a:tailEnd type="none" w="med" len="med"/>
+                    </a:lnT>
+                    <a:lnB w="9525" cap="flat" cmpd="sng" algn="ctr">
+                      <a:solidFill>
+                        <a:srgbClr val="444746"/>
+                      </a:solidFill>
+                      <a:prstDash val="solid"/>
+                      <a:round/>
+                      <a:headEnd type="none" w="med" len="med"/>
+                      <a:tailEnd type="none" w="med" len="med"/>
+                    </a:lnB>
+                    <a:solidFill>
+                      <a:srgbClr val="131314"/>
+                    </a:solidFill>
+                  </a:tcPr>
+                </a:tc>
+                <a:tc>
+                  <a:txBody>
+                    <a:bodyPr/>
+                    <a:lstStyle/>
+                    <a:p>
+                      <a:pPr algn="l" fontAlgn="t">
+                        <a:lnSpc>
+                          <a:spcPts val="1800"/>
+                        </a:lnSpc>
+                        <a:buNone/>
+                      </a:pPr>
+                      <a:r>
+                        <a:rPr lang="en-US" sz="700">
+                          <a:solidFill>
+                            <a:srgbClr val="FFFFFF"/>
+                          </a:solidFill>
+                          <a:effectLst/>
+                        </a:rPr>
+                        <a:t>A file named </a:t>
+                      </a:r>
+                      <a:r>
+                        <a:rPr lang="en-US" sz="700" b="0">
+                          <a:solidFill>
+                            <a:srgbClr val="FFFFFF"/>
+                          </a:solidFill>
+                          <a:effectLst/>
+                          <a:latin typeface="Google Sans Mono"/>
+                        </a:rPr>
+                        <a:t>dr-helpdesk-webapp.PublishSettings</a:t>
+                      </a:r>
+                      <a:r>
+                        <a:rPr lang="en-US" sz="700">
+                          <a:solidFill>
+                            <a:srgbClr val="FFFFFF"/>
+                          </a:solidFill>
+                          <a:effectLst/>
+                        </a:rPr>
+                        <a:t> will be downloaded. This is a simple text file containing XML credentials.</a:t>
+                      </a:r>
+                    </a:p>
+                  </a:txBody>
+                  <a:tcPr marL="31327" marR="31327" marT="31327" marB="31327">
+                    <a:lnL>
+                      <a:noFill/>
+                    </a:lnL>
+                    <a:lnR>
+                      <a:noFill/>
+                    </a:lnR>
+                    <a:lnT w="9525" cap="flat" cmpd="sng" algn="ctr">
+                      <a:solidFill>
+                        <a:srgbClr val="444746"/>
+                      </a:solidFill>
+                      <a:prstDash val="solid"/>
+                      <a:round/>
+                      <a:headEnd type="none" w="med" len="med"/>
+                      <a:tailEnd type="none" w="med" len="med"/>
+                    </a:lnT>
+                    <a:lnB w="9525" cap="flat" cmpd="sng" algn="ctr">
+                      <a:solidFill>
+                        <a:srgbClr val="444746"/>
+                      </a:solidFill>
+                      <a:prstDash val="solid"/>
+                      <a:round/>
+                      <a:headEnd type="none" w="med" len="med"/>
+                      <a:tailEnd type="none" w="med" len="med"/>
+                    </a:lnB>
+                    <a:solidFill>
+                      <a:srgbClr val="131314"/>
+                    </a:solidFill>
+                  </a:tcPr>
+                </a:tc>
+                <a:extLst>
+                  <a:ext uri="{0D108BD9-81ED-4DB2-BD59-A6C34878D82A}">
+                    <a16:rowId xmlns:a16="http://schemas.microsoft.com/office/drawing/2014/main" val="1279260947"/>
+                  </a:ext>
+                </a:extLst>
+              </a:tr>
+              <a:tr h="964875">
+                <a:tc>
+                  <a:txBody>
+                    <a:bodyPr/>
+                    <a:lstStyle/>
+                    <a:p>
+                      <a:pPr algn="l" fontAlgn="t">
+                        <a:buNone/>
+                      </a:pPr>
+                      <a:r>
+                        <a:rPr lang="en-US" sz="700" b="0">
+                          <a:solidFill>
+                            <a:srgbClr val="FFFFFF"/>
+                          </a:solidFill>
+                          <a:effectLst/>
+                          <a:latin typeface="Google Sans Text"/>
+                        </a:rPr>
+                        <a:t>2. Go to GitHub Secrets</a:t>
+                      </a:r>
+                      <a:endParaRPr lang="en-US" sz="700">
+                        <a:solidFill>
+                          <a:srgbClr val="FFFFFF"/>
+                        </a:solidFill>
+                        <a:effectLst/>
+                      </a:endParaRPr>
+                    </a:p>
+                  </a:txBody>
+                  <a:tcPr marL="31327" marR="31327" marT="31327" marB="31327">
+                    <a:lnL>
+                      <a:noFill/>
+                    </a:lnL>
+                    <a:lnR>
+                      <a:noFill/>
+                    </a:lnR>
+                    <a:lnT w="9525" cap="flat" cmpd="sng" algn="ctr">
+                      <a:solidFill>
+                        <a:srgbClr val="444746"/>
+                      </a:solidFill>
+                      <a:prstDash val="solid"/>
+                      <a:round/>
+                      <a:headEnd type="none" w="med" len="med"/>
+                      <a:tailEnd type="none" w="med" len="med"/>
+                    </a:lnT>
+                    <a:lnB w="9525" cap="flat" cmpd="sng" algn="ctr">
+                      <a:solidFill>
+                        <a:srgbClr val="444746"/>
+                      </a:solidFill>
+                      <a:prstDash val="solid"/>
+                      <a:round/>
+                      <a:headEnd type="none" w="med" len="med"/>
+                      <a:tailEnd type="none" w="med" len="med"/>
+                    </a:lnB>
+                    <a:solidFill>
+                      <a:srgbClr val="131314"/>
+                    </a:solidFill>
+                  </a:tcPr>
+                </a:tc>
+                <a:tc>
+                  <a:txBody>
+                    <a:bodyPr/>
+                    <a:lstStyle/>
+                    <a:p>
+                      <a:pPr algn="l" fontAlgn="t">
+                        <a:buNone/>
+                      </a:pPr>
+                      <a:r>
+                        <a:rPr lang="en-US" sz="700" dirty="0">
+                          <a:solidFill>
+                            <a:srgbClr val="FFFFFF"/>
+                          </a:solidFill>
+                          <a:effectLst/>
+                        </a:rPr>
+                        <a:t>Open your GitHub repository in a web browser. Go to the </a:t>
+                      </a:r>
+                      <a:r>
+                        <a:rPr lang="en-US" sz="700" b="0" dirty="0">
+                          <a:solidFill>
+                            <a:srgbClr val="FFFFFF"/>
+                          </a:solidFill>
+                          <a:effectLst/>
+                          <a:latin typeface="Google Sans Text"/>
+                        </a:rPr>
+                        <a:t>Settings</a:t>
+                      </a:r>
+                      <a:r>
+                        <a:rPr lang="en-US" sz="700" dirty="0">
+                          <a:solidFill>
+                            <a:srgbClr val="FFFFFF"/>
+                          </a:solidFill>
+                          <a:effectLst/>
+                        </a:rPr>
+                        <a:t> tab. In the left menu, under "Security", click on </a:t>
+                      </a:r>
+                      <a:r>
+                        <a:rPr lang="en-US" sz="700" b="0" dirty="0">
+                          <a:solidFill>
+                            <a:srgbClr val="FFFFFF"/>
+                          </a:solidFill>
+                          <a:effectLst/>
+                          <a:latin typeface="Google Sans Text"/>
+                        </a:rPr>
+                        <a:t>Secrets and variables &gt; Actions</a:t>
+                      </a:r>
+                      <a:r>
+                        <a:rPr lang="en-US" sz="700" dirty="0">
+                          <a:solidFill>
+                            <a:srgbClr val="FFFFFF"/>
+                          </a:solidFill>
+                          <a:effectLst/>
+                        </a:rPr>
+                        <a:t>.</a:t>
+                      </a:r>
+                    </a:p>
+                  </a:txBody>
+                  <a:tcPr marL="31327" marR="31327" marT="31327" marB="31327">
+                    <a:lnL>
+                      <a:noFill/>
+                    </a:lnL>
+                    <a:lnR>
+                      <a:noFill/>
+                    </a:lnR>
+                    <a:lnT w="9525" cap="flat" cmpd="sng" algn="ctr">
+                      <a:solidFill>
+                        <a:srgbClr val="444746"/>
+                      </a:solidFill>
+                      <a:prstDash val="solid"/>
+                      <a:round/>
+                      <a:headEnd type="none" w="med" len="med"/>
+                      <a:tailEnd type="none" w="med" len="med"/>
+                    </a:lnT>
+                    <a:lnB w="9525" cap="flat" cmpd="sng" algn="ctr">
+                      <a:solidFill>
+                        <a:srgbClr val="444746"/>
+                      </a:solidFill>
+                      <a:prstDash val="solid"/>
+                      <a:round/>
+                      <a:headEnd type="none" w="med" len="med"/>
+                      <a:tailEnd type="none" w="med" len="med"/>
+                    </a:lnB>
+                    <a:solidFill>
+                      <a:srgbClr val="131314"/>
+                    </a:solidFill>
+                  </a:tcPr>
+                </a:tc>
+                <a:tc>
+                  <a:txBody>
+                    <a:bodyPr/>
+                    <a:lstStyle/>
+                    <a:p>
+                      <a:pPr algn="l" fontAlgn="t">
+                        <a:buNone/>
+                      </a:pPr>
+                      <a:r>
+                        <a:rPr lang="en-US" sz="700">
+                          <a:solidFill>
+                            <a:srgbClr val="FFFFFF"/>
+                          </a:solidFill>
+                          <a:effectLst/>
+                        </a:rPr>
+                        <a:t>This is the secure vault where you can store sensitive information for your workflows.</a:t>
+                      </a:r>
+                    </a:p>
+                  </a:txBody>
+                  <a:tcPr marL="31327" marR="31327" marT="31327" marB="31327">
+                    <a:lnL>
+                      <a:noFill/>
+                    </a:lnL>
+                    <a:lnR>
+                      <a:noFill/>
+                    </a:lnR>
+                    <a:lnT w="9525" cap="flat" cmpd="sng" algn="ctr">
+                      <a:solidFill>
+                        <a:srgbClr val="444746"/>
+                      </a:solidFill>
+                      <a:prstDash val="solid"/>
+                      <a:round/>
+                      <a:headEnd type="none" w="med" len="med"/>
+                      <a:tailEnd type="none" w="med" len="med"/>
+                    </a:lnT>
+                    <a:lnB w="9525" cap="flat" cmpd="sng" algn="ctr">
+                      <a:solidFill>
+                        <a:srgbClr val="444746"/>
+                      </a:solidFill>
+                      <a:prstDash val="solid"/>
+                      <a:round/>
+                      <a:headEnd type="none" w="med" len="med"/>
+                      <a:tailEnd type="none" w="med" len="med"/>
+                    </a:lnB>
+                    <a:solidFill>
+                      <a:srgbClr val="131314"/>
+                    </a:solidFill>
+                  </a:tcPr>
+                </a:tc>
+                <a:extLst>
+                  <a:ext uri="{0D108BD9-81ED-4DB2-BD59-A6C34878D82A}">
+                    <a16:rowId xmlns:a16="http://schemas.microsoft.com/office/drawing/2014/main" val="2516805366"/>
+                  </a:ext>
+                </a:extLst>
+              </a:tr>
+              <a:tr h="400987">
+                <a:tc>
+                  <a:txBody>
+                    <a:bodyPr/>
+                    <a:lstStyle/>
+                    <a:p>
+                      <a:pPr algn="l" fontAlgn="t">
+                        <a:buNone/>
+                      </a:pPr>
+                      <a:r>
+                        <a:rPr lang="en-US" sz="700" b="0">
+                          <a:solidFill>
+                            <a:srgbClr val="FFFFFF"/>
+                          </a:solidFill>
+                          <a:effectLst/>
+                          <a:latin typeface="Google Sans Text"/>
+                        </a:rPr>
+                        <a:t>3. Create a New Secret</a:t>
+                      </a:r>
+                      <a:endParaRPr lang="en-US" sz="700">
+                        <a:solidFill>
+                          <a:srgbClr val="FFFFFF"/>
+                        </a:solidFill>
+                        <a:effectLst/>
+                      </a:endParaRPr>
+                    </a:p>
+                  </a:txBody>
+                  <a:tcPr marL="31327" marR="31327" marT="31327" marB="31327">
+                    <a:lnL>
+                      <a:noFill/>
+                    </a:lnL>
+                    <a:lnR>
+                      <a:noFill/>
+                    </a:lnR>
+                    <a:lnT w="9525" cap="flat" cmpd="sng" algn="ctr">
+                      <a:solidFill>
+                        <a:srgbClr val="444746"/>
+                      </a:solidFill>
+                      <a:prstDash val="solid"/>
+                      <a:round/>
+                      <a:headEnd type="none" w="med" len="med"/>
+                      <a:tailEnd type="none" w="med" len="med"/>
+                    </a:lnT>
+                    <a:lnB w="9525" cap="flat" cmpd="sng" algn="ctr">
+                      <a:solidFill>
+                        <a:srgbClr val="444746"/>
+                      </a:solidFill>
+                      <a:prstDash val="solid"/>
+                      <a:round/>
+                      <a:headEnd type="none" w="med" len="med"/>
+                      <a:tailEnd type="none" w="med" len="med"/>
+                    </a:lnB>
+                    <a:solidFill>
+                      <a:srgbClr val="131314"/>
+                    </a:solidFill>
+                  </a:tcPr>
+                </a:tc>
+                <a:tc>
+                  <a:txBody>
+                    <a:bodyPr/>
+                    <a:lstStyle/>
+                    <a:p>
+                      <a:pPr algn="l" fontAlgn="t">
+                        <a:buNone/>
+                      </a:pPr>
+                      <a:r>
+                        <a:rPr lang="en-US" sz="700">
+                          <a:solidFill>
+                            <a:srgbClr val="FFFFFF"/>
+                          </a:solidFill>
+                          <a:effectLst/>
+                        </a:rPr>
+                        <a:t>Click the </a:t>
+                      </a:r>
+                      <a:r>
+                        <a:rPr lang="en-US" sz="700" b="0">
+                          <a:solidFill>
+                            <a:srgbClr val="FFFFFF"/>
+                          </a:solidFill>
+                          <a:effectLst/>
+                          <a:latin typeface="Google Sans Text"/>
+                        </a:rPr>
+                        <a:t>"New repository secret"</a:t>
+                      </a:r>
+                      <a:r>
+                        <a:rPr lang="en-US" sz="700">
+                          <a:solidFill>
+                            <a:srgbClr val="FFFFFF"/>
+                          </a:solidFill>
+                          <a:effectLst/>
+                        </a:rPr>
+                        <a:t> button.</a:t>
+                      </a:r>
+                    </a:p>
+                  </a:txBody>
+                  <a:tcPr marL="31327" marR="31327" marT="31327" marB="31327">
+                    <a:lnL>
+                      <a:noFill/>
+                    </a:lnL>
+                    <a:lnR>
+                      <a:noFill/>
+                    </a:lnR>
+                    <a:lnT w="9525" cap="flat" cmpd="sng" algn="ctr">
+                      <a:solidFill>
+                        <a:srgbClr val="444746"/>
+                      </a:solidFill>
+                      <a:prstDash val="solid"/>
+                      <a:round/>
+                      <a:headEnd type="none" w="med" len="med"/>
+                      <a:tailEnd type="none" w="med" len="med"/>
+                    </a:lnT>
+                    <a:lnB w="9525" cap="flat" cmpd="sng" algn="ctr">
+                      <a:solidFill>
+                        <a:srgbClr val="444746"/>
+                      </a:solidFill>
+                      <a:prstDash val="solid"/>
+                      <a:round/>
+                      <a:headEnd type="none" w="med" len="med"/>
+                      <a:tailEnd type="none" w="med" len="med"/>
+                    </a:lnB>
+                    <a:solidFill>
+                      <a:srgbClr val="131314"/>
+                    </a:solidFill>
+                  </a:tcPr>
+                </a:tc>
+                <a:tc>
+                  <a:txBody>
+                    <a:bodyPr/>
+                    <a:lstStyle/>
+                    <a:p>
+                      <a:pPr algn="l" fontAlgn="t">
+                        <a:buNone/>
+                      </a:pPr>
+                      <a:r>
+                        <a:rPr lang="en-US" sz="700">
+                          <a:solidFill>
+                            <a:srgbClr val="FFFFFF"/>
+                          </a:solidFill>
+                          <a:effectLst/>
+                        </a:rPr>
+                        <a:t>You'll be presented with two text boxes: "Name" and "Value".</a:t>
+                      </a:r>
+                    </a:p>
+                  </a:txBody>
+                  <a:tcPr marL="31327" marR="31327" marT="31327" marB="31327">
+                    <a:lnL>
+                      <a:noFill/>
+                    </a:lnL>
+                    <a:lnR>
+                      <a:noFill/>
+                    </a:lnR>
+                    <a:lnT w="9525" cap="flat" cmpd="sng" algn="ctr">
+                      <a:solidFill>
+                        <a:srgbClr val="444746"/>
+                      </a:solidFill>
+                      <a:prstDash val="solid"/>
+                      <a:round/>
+                      <a:headEnd type="none" w="med" len="med"/>
+                      <a:tailEnd type="none" w="med" len="med"/>
+                    </a:lnT>
+                    <a:lnB w="9525" cap="flat" cmpd="sng" algn="ctr">
+                      <a:solidFill>
+                        <a:srgbClr val="444746"/>
+                      </a:solidFill>
+                      <a:prstDash val="solid"/>
+                      <a:round/>
+                      <a:headEnd type="none" w="med" len="med"/>
+                      <a:tailEnd type="none" w="med" len="med"/>
+                    </a:lnB>
+                    <a:solidFill>
+                      <a:srgbClr val="131314"/>
+                    </a:solidFill>
+                  </a:tcPr>
+                </a:tc>
+                <a:extLst>
+                  <a:ext uri="{0D108BD9-81ED-4DB2-BD59-A6C34878D82A}">
+                    <a16:rowId xmlns:a16="http://schemas.microsoft.com/office/drawing/2014/main" val="2896723331"/>
+                  </a:ext>
+                </a:extLst>
+              </a:tr>
+              <a:tr h="1383093">
+                <a:tc>
+                  <a:txBody>
+                    <a:bodyPr/>
+                    <a:lstStyle/>
+                    <a:p>
+                      <a:pPr algn="l" fontAlgn="t">
+                        <a:buNone/>
+                      </a:pPr>
+                      <a:r>
+                        <a:rPr lang="en-US" sz="700" b="0">
+                          <a:solidFill>
+                            <a:srgbClr val="FFFFFF"/>
+                          </a:solidFill>
+                          <a:effectLst/>
+                          <a:latin typeface="Google Sans Text"/>
+                        </a:rPr>
+                        <a:t>4. Store the Secret</a:t>
+                      </a:r>
+                      <a:endParaRPr lang="en-US" sz="700">
+                        <a:solidFill>
+                          <a:srgbClr val="FFFFFF"/>
+                        </a:solidFill>
+                        <a:effectLst/>
+                      </a:endParaRPr>
+                    </a:p>
+                  </a:txBody>
+                  <a:tcPr marL="31327" marR="31327" marT="31327" marB="31327">
+                    <a:lnL>
+                      <a:noFill/>
+                    </a:lnL>
+                    <a:lnR>
+                      <a:noFill/>
+                    </a:lnR>
+                    <a:lnT w="9525" cap="flat" cmpd="sng" algn="ctr">
+                      <a:solidFill>
+                        <a:srgbClr val="444746"/>
+                      </a:solidFill>
+                      <a:prstDash val="solid"/>
+                      <a:round/>
+                      <a:headEnd type="none" w="med" len="med"/>
+                      <a:tailEnd type="none" w="med" len="med"/>
+                    </a:lnT>
+                    <a:lnB w="9525" cap="flat" cmpd="sng" algn="ctr">
+                      <a:solidFill>
+                        <a:srgbClr val="444746"/>
+                      </a:solidFill>
+                      <a:prstDash val="solid"/>
+                      <a:round/>
+                      <a:headEnd type="none" w="med" len="med"/>
+                      <a:tailEnd type="none" w="med" len="med"/>
+                    </a:lnB>
+                    <a:solidFill>
+                      <a:srgbClr val="131314"/>
+                    </a:solidFill>
+                  </a:tcPr>
+                </a:tc>
+                <a:tc>
+                  <a:txBody>
+                    <a:bodyPr/>
+                    <a:lstStyle/>
+                    <a:p>
+                      <a:pPr algn="l" fontAlgn="t">
+                        <a:lnSpc>
+                          <a:spcPts val="1800"/>
+                        </a:lnSpc>
+                        <a:buNone/>
+                      </a:pPr>
+                      <a:r>
+                        <a:rPr lang="en-US" sz="700">
+                          <a:solidFill>
+                            <a:srgbClr val="FFFFFF"/>
+                          </a:solidFill>
+                          <a:effectLst/>
+                        </a:rPr>
+                        <a:t>In the </a:t>
+                      </a:r>
+                      <a:r>
+                        <a:rPr lang="en-US" sz="700" b="0">
+                          <a:solidFill>
+                            <a:srgbClr val="FFFFFF"/>
+                          </a:solidFill>
+                          <a:effectLst/>
+                          <a:latin typeface="Google Sans Text"/>
+                        </a:rPr>
+                        <a:t>Name</a:t>
+                      </a:r>
+                      <a:r>
+                        <a:rPr lang="en-US" sz="700">
+                          <a:solidFill>
+                            <a:srgbClr val="FFFFFF"/>
+                          </a:solidFill>
+                          <a:effectLst/>
+                        </a:rPr>
+                        <a:t> box, type exactly: </a:t>
+                      </a:r>
+                      <a:r>
+                        <a:rPr lang="en-US" sz="700" b="0">
+                          <a:solidFill>
+                            <a:srgbClr val="FFFFFF"/>
+                          </a:solidFill>
+                          <a:effectLst/>
+                          <a:latin typeface="Google Sans Mono"/>
+                        </a:rPr>
+                        <a:t>AZURE_WEBAPP_PUBLISH_PROFILE</a:t>
+                      </a:r>
+                      <a:r>
+                        <a:rPr lang="en-US" sz="700">
+                          <a:solidFill>
+                            <a:srgbClr val="FFFFFF"/>
+                          </a:solidFill>
+                          <a:effectLst/>
+                        </a:rPr>
+                        <a:t> Now, open the </a:t>
+                      </a:r>
+                      <a:r>
+                        <a:rPr lang="en-US" sz="700" b="0">
+                          <a:solidFill>
+                            <a:srgbClr val="FFFFFF"/>
+                          </a:solidFill>
+                          <a:effectLst/>
+                          <a:latin typeface="Google Sans Mono"/>
+                        </a:rPr>
+                        <a:t>.PublishSettings</a:t>
+                      </a:r>
+                      <a:r>
+                        <a:rPr lang="en-US" sz="700">
+                          <a:solidFill>
+                            <a:srgbClr val="FFFFFF"/>
+                          </a:solidFill>
+                          <a:effectLst/>
+                        </a:rPr>
+                        <a:t> file you downloaded in a text editor (like Notepad). Copy the </a:t>
+                      </a:r>
+                      <a:r>
+                        <a:rPr lang="en-US" sz="700" i="1">
+                          <a:solidFill>
+                            <a:srgbClr val="FFFFFF"/>
+                          </a:solidFill>
+                          <a:effectLst/>
+                        </a:rPr>
+                        <a:t>entire contents</a:t>
+                      </a:r>
+                      <a:r>
+                        <a:rPr lang="en-US" sz="700">
+                          <a:solidFill>
+                            <a:srgbClr val="FFFFFF"/>
+                          </a:solidFill>
+                          <a:effectLst/>
+                        </a:rPr>
+                        <a:t> of the file. Paste that entire block of text into the </a:t>
+                      </a:r>
+                      <a:r>
+                        <a:rPr lang="en-US" sz="700" b="0">
+                          <a:solidFill>
+                            <a:srgbClr val="FFFFFF"/>
+                          </a:solidFill>
+                          <a:effectLst/>
+                          <a:latin typeface="Google Sans Text"/>
+                        </a:rPr>
+                        <a:t>Value</a:t>
+                      </a:r>
+                      <a:r>
+                        <a:rPr lang="en-US" sz="700">
+                          <a:solidFill>
+                            <a:srgbClr val="FFFFFF"/>
+                          </a:solidFill>
+                          <a:effectLst/>
+                        </a:rPr>
+                        <a:t> (or </a:t>
+                      </a:r>
+                      <a:r>
+                        <a:rPr lang="en-US" sz="700" b="0">
+                          <a:solidFill>
+                            <a:srgbClr val="FFFFFF"/>
+                          </a:solidFill>
+                          <a:effectLst/>
+                          <a:latin typeface="Google Sans Text"/>
+                        </a:rPr>
+                        <a:t>Secret</a:t>
+                      </a:r>
+                      <a:r>
+                        <a:rPr lang="en-US" sz="700">
+                          <a:solidFill>
+                            <a:srgbClr val="FFFFFF"/>
+                          </a:solidFill>
+                          <a:effectLst/>
+                        </a:rPr>
+                        <a:t>) box on GitHub.</a:t>
+                      </a:r>
+                    </a:p>
+                  </a:txBody>
+                  <a:tcPr marL="31327" marR="31327" marT="31327" marB="31327">
+                    <a:lnL>
+                      <a:noFill/>
+                    </a:lnL>
+                    <a:lnR>
+                      <a:noFill/>
+                    </a:lnR>
+                    <a:lnT w="9525" cap="flat" cmpd="sng" algn="ctr">
+                      <a:solidFill>
+                        <a:srgbClr val="444746"/>
+                      </a:solidFill>
+                      <a:prstDash val="solid"/>
+                      <a:round/>
+                      <a:headEnd type="none" w="med" len="med"/>
+                      <a:tailEnd type="none" w="med" len="med"/>
+                    </a:lnT>
+                    <a:lnB w="9525" cap="flat" cmpd="sng" algn="ctr">
+                      <a:solidFill>
+                        <a:srgbClr val="444746"/>
+                      </a:solidFill>
+                      <a:prstDash val="solid"/>
+                      <a:round/>
+                      <a:headEnd type="none" w="med" len="med"/>
+                      <a:tailEnd type="none" w="med" len="med"/>
+                    </a:lnB>
+                    <a:solidFill>
+                      <a:srgbClr val="131314"/>
+                    </a:solidFill>
+                  </a:tcPr>
+                </a:tc>
+                <a:tc>
+                  <a:txBody>
+                    <a:bodyPr/>
+                    <a:lstStyle/>
+                    <a:p>
+                      <a:pPr algn="l" fontAlgn="t">
+                        <a:buNone/>
+                      </a:pPr>
+                      <a:r>
+                        <a:rPr lang="en-US" sz="700">
+                          <a:solidFill>
+                            <a:srgbClr val="FFFFFF"/>
+                          </a:solidFill>
+                          <a:effectLst/>
+                        </a:rPr>
+                        <a:t>This name is case-sensitive and must match what our workflow file expects.</a:t>
+                      </a:r>
+                    </a:p>
+                  </a:txBody>
+                  <a:tcPr marL="31327" marR="31327" marT="31327" marB="31327">
+                    <a:lnL>
+                      <a:noFill/>
+                    </a:lnL>
+                    <a:lnR>
+                      <a:noFill/>
+                    </a:lnR>
+                    <a:lnT w="9525" cap="flat" cmpd="sng" algn="ctr">
+                      <a:solidFill>
+                        <a:srgbClr val="444746"/>
+                      </a:solidFill>
+                      <a:prstDash val="solid"/>
+                      <a:round/>
+                      <a:headEnd type="none" w="med" len="med"/>
+                      <a:tailEnd type="none" w="med" len="med"/>
+                    </a:lnT>
+                    <a:lnB w="9525" cap="flat" cmpd="sng" algn="ctr">
+                      <a:solidFill>
+                        <a:srgbClr val="444746"/>
+                      </a:solidFill>
+                      <a:prstDash val="solid"/>
+                      <a:round/>
+                      <a:headEnd type="none" w="med" len="med"/>
+                      <a:tailEnd type="none" w="med" len="med"/>
+                    </a:lnB>
+                    <a:solidFill>
+                      <a:srgbClr val="131314"/>
+                    </a:solidFill>
+                  </a:tcPr>
+                </a:tc>
+                <a:extLst>
+                  <a:ext uri="{0D108BD9-81ED-4DB2-BD59-A6C34878D82A}">
+                    <a16:rowId xmlns:a16="http://schemas.microsoft.com/office/drawing/2014/main" val="3833217303"/>
+                  </a:ext>
+                </a:extLst>
+              </a:tr>
+              <a:tr h="513765">
+                <a:tc>
+                  <a:txBody>
+                    <a:bodyPr/>
+                    <a:lstStyle/>
+                    <a:p>
+                      <a:pPr algn="l" fontAlgn="t">
+                        <a:buNone/>
+                      </a:pPr>
+                      <a:r>
+                        <a:rPr lang="en-US" sz="700" b="0">
+                          <a:solidFill>
+                            <a:srgbClr val="FFFFFF"/>
+                          </a:solidFill>
+                          <a:effectLst/>
+                          <a:latin typeface="Google Sans Text"/>
+                        </a:rPr>
+                        <a:t>5. Save the Secret</a:t>
+                      </a:r>
+                      <a:endParaRPr lang="en-US" sz="700">
+                        <a:solidFill>
+                          <a:srgbClr val="FFFFFF"/>
+                        </a:solidFill>
+                        <a:effectLst/>
+                      </a:endParaRPr>
+                    </a:p>
+                  </a:txBody>
+                  <a:tcPr marL="31327" marR="31327" marT="31327" marB="31327">
+                    <a:lnL>
+                      <a:noFill/>
+                    </a:lnL>
+                    <a:lnR>
+                      <a:noFill/>
+                    </a:lnR>
+                    <a:lnT w="9525" cap="flat" cmpd="sng" algn="ctr">
+                      <a:solidFill>
+                        <a:srgbClr val="444746"/>
+                      </a:solidFill>
+                      <a:prstDash val="solid"/>
+                      <a:round/>
+                      <a:headEnd type="none" w="med" len="med"/>
+                      <a:tailEnd type="none" w="med" len="med"/>
+                    </a:lnT>
+                    <a:lnB>
+                      <a:noFill/>
+                    </a:lnB>
+                    <a:solidFill>
+                      <a:srgbClr val="131314"/>
+                    </a:solidFill>
+                  </a:tcPr>
+                </a:tc>
+                <a:tc>
+                  <a:txBody>
+                    <a:bodyPr/>
+                    <a:lstStyle/>
+                    <a:p>
+                      <a:pPr algn="l" fontAlgn="t">
+                        <a:buNone/>
+                      </a:pPr>
+                      <a:r>
+                        <a:rPr lang="en-US" sz="700">
+                          <a:solidFill>
+                            <a:srgbClr val="FFFFFF"/>
+                          </a:solidFill>
+                          <a:effectLst/>
+                        </a:rPr>
+                        <a:t>Click the </a:t>
+                      </a:r>
+                      <a:r>
+                        <a:rPr lang="en-US" sz="700" b="0">
+                          <a:solidFill>
+                            <a:srgbClr val="FFFFFF"/>
+                          </a:solidFill>
+                          <a:effectLst/>
+                          <a:latin typeface="Google Sans Text"/>
+                        </a:rPr>
+                        <a:t>"Add secret"</a:t>
+                      </a:r>
+                      <a:r>
+                        <a:rPr lang="en-US" sz="700">
+                          <a:solidFill>
+                            <a:srgbClr val="FFFFFF"/>
+                          </a:solidFill>
+                          <a:effectLst/>
+                        </a:rPr>
+                        <a:t> button.</a:t>
+                      </a:r>
+                    </a:p>
+                  </a:txBody>
+                  <a:tcPr marL="31327" marR="31327" marT="31327" marB="31327">
+                    <a:lnL>
+                      <a:noFill/>
+                    </a:lnL>
+                    <a:lnR>
+                      <a:noFill/>
+                    </a:lnR>
+                    <a:lnT w="9525" cap="flat" cmpd="sng" algn="ctr">
+                      <a:solidFill>
+                        <a:srgbClr val="444746"/>
+                      </a:solidFill>
+                      <a:prstDash val="solid"/>
+                      <a:round/>
+                      <a:headEnd type="none" w="med" len="med"/>
+                      <a:tailEnd type="none" w="med" len="med"/>
+                    </a:lnT>
+                    <a:lnB>
+                      <a:noFill/>
+                    </a:lnB>
+                    <a:solidFill>
+                      <a:srgbClr val="131314"/>
+                    </a:solidFill>
+                  </a:tcPr>
+                </a:tc>
+                <a:tc>
+                  <a:txBody>
+                    <a:bodyPr/>
+                    <a:lstStyle/>
+                    <a:p>
+                      <a:pPr algn="l" fontAlgn="t">
+                        <a:buNone/>
+                      </a:pPr>
+                      <a:r>
+                        <a:rPr lang="en-US" sz="700" dirty="0">
+                          <a:solidFill>
+                            <a:srgbClr val="FFFFFF"/>
+                          </a:solidFill>
+                          <a:effectLst/>
+                        </a:rPr>
+                        <a:t>Your secret is now securely stored and ready for the workflow to use.</a:t>
+                      </a:r>
+                    </a:p>
+                  </a:txBody>
+                  <a:tcPr marL="31327" marR="31327" marT="31327" marB="31327">
+                    <a:lnL>
+                      <a:noFill/>
+                    </a:lnL>
+                    <a:lnR>
+                      <a:noFill/>
+                    </a:lnR>
+                    <a:lnT w="9525" cap="flat" cmpd="sng" algn="ctr">
+                      <a:solidFill>
+                        <a:srgbClr val="444746"/>
+                      </a:solidFill>
+                      <a:prstDash val="solid"/>
+                      <a:round/>
+                      <a:headEnd type="none" w="med" len="med"/>
+                      <a:tailEnd type="none" w="med" len="med"/>
+                    </a:lnT>
+                    <a:lnB>
+                      <a:noFill/>
+                    </a:lnB>
+                    <a:solidFill>
+                      <a:srgbClr val="131314"/>
+                    </a:solidFill>
+                  </a:tcPr>
+                </a:tc>
+                <a:extLst>
+                  <a:ext uri="{0D108BD9-81ED-4DB2-BD59-A6C34878D82A}">
+                    <a16:rowId xmlns:a16="http://schemas.microsoft.com/office/drawing/2014/main" val="4107439912"/>
+                  </a:ext>
+                </a:extLst>
+              </a:tr>
+            </a:tbl>
+          </a:graphicData>
+        </a:graphic>
+      </p:graphicFrame>
       <p:sp>
         <p:nvSpPr>
-          <p:cNvPr id="4" name="TextBox 3">
-            <a:extLst>
-              <a:ext uri="{FF2B5EF4-FFF2-40B4-BE49-F238E27FC236}">
-                <a16:creationId xmlns:a16="http://schemas.microsoft.com/office/drawing/2014/main" id="{1F5FAEA7-2694-3CFD-FE88-5C2BE935249E}"/>
+          <p:cNvPr id="37" name="TextBox 36">
+            <a:extLst>
+              <a:ext uri="{FF2B5EF4-FFF2-40B4-BE49-F238E27FC236}">
+                <a16:creationId xmlns:a16="http://schemas.microsoft.com/office/drawing/2014/main" id="{CE9F1366-61AA-88D1-A833-7449BAAC91E0}"/>
               </a:ext>
             </a:extLst>
           </p:cNvPr>
@@ -4258,7 +5538,7 @@
     </p:spTree>
     <p:extLst>
       <p:ext uri="{BB962C8B-B14F-4D97-AF65-F5344CB8AC3E}">
-        <p14:creationId xmlns:p14="http://schemas.microsoft.com/office/powerpoint/2010/main" val="504004102"/>
+        <p14:creationId xmlns:p14="http://schemas.microsoft.com/office/powerpoint/2010/main" val="2637092012"/>
       </p:ext>
     </p:extLst>
   </p:cSld>
@@ -4287,10 +5567,10 @@
       </p:grpSpPr>
       <p:sp>
         <p:nvSpPr>
-          <p:cNvPr id="2" name="TextBox 1">
-            <a:extLst>
-              <a:ext uri="{FF2B5EF4-FFF2-40B4-BE49-F238E27FC236}">
-                <a16:creationId xmlns:a16="http://schemas.microsoft.com/office/drawing/2014/main" id="{5C563D94-AEF0-25D6-1948-F1E9BAC0FEDD}"/>
+          <p:cNvPr id="5" name="TextBox 4">
+            <a:extLst>
+              <a:ext uri="{FF2B5EF4-FFF2-40B4-BE49-F238E27FC236}">
+                <a16:creationId xmlns:a16="http://schemas.microsoft.com/office/drawing/2014/main" id="{A822B216-50C9-88B7-211A-4719273A80A2}"/>
               </a:ext>
             </a:extLst>
           </p:cNvPr>
@@ -4299,8 +5579,855 @@
         </p:nvSpPr>
         <p:spPr>
           <a:xfrm>
-            <a:off x="1028700" y="1195754"/>
-            <a:ext cx="2268415" cy="369332"/>
+            <a:off x="1819835" y="946466"/>
+            <a:ext cx="6096000" cy="877163"/>
+          </a:xfrm>
+          <a:prstGeom prst="rect">
+            <a:avLst/>
+          </a:prstGeom>
+          <a:noFill/>
+        </p:spPr>
+        <p:txBody>
+          <a:bodyPr wrap="square">
+            <a:spAutoFit/>
+          </a:bodyPr>
+          <a:lstStyle/>
+          <a:p>
+            <a:pPr algn="l">
+              <a:lnSpc>
+                <a:spcPts val="1800"/>
+              </a:lnSpc>
+              <a:buNone/>
+            </a:pPr>
+            <a:r>
+              <a:rPr lang="en-US" b="1" dirty="0">
+                <a:effectLst/>
+                <a:latin typeface="Google Sans Text"/>
+              </a:rPr>
+              <a:t>Phase 2: Create the Workflow File</a:t>
+            </a:r>
+          </a:p>
+          <a:p>
+            <a:pPr algn="l">
+              <a:buNone/>
+            </a:pPr>
+            <a:r>
+              <a:rPr lang="en-US" b="0" i="0" dirty="0">
+                <a:effectLst/>
+                <a:latin typeface="Google Sans Text"/>
+              </a:rPr>
+              <a:t>Now we create the "recipe" file that tells GitHub Actions how to build and deploy your app.</a:t>
+            </a:r>
+          </a:p>
+        </p:txBody>
+      </p:sp>
+      <p:graphicFrame>
+        <p:nvGraphicFramePr>
+          <p:cNvPr id="6" name="Table 5">
+            <a:extLst>
+              <a:ext uri="{FF2B5EF4-FFF2-40B4-BE49-F238E27FC236}">
+                <a16:creationId xmlns:a16="http://schemas.microsoft.com/office/drawing/2014/main" id="{65556AFC-364B-ED58-23C2-4775F4B3A898}"/>
+              </a:ext>
+            </a:extLst>
+          </p:cNvPr>
+          <p:cNvGraphicFramePr>
+            <a:graphicFrameLocks noGrp="1"/>
+          </p:cNvGraphicFramePr>
+          <p:nvPr>
+            <p:extLst>
+              <p:ext uri="{D42A27DB-BD31-4B8C-83A1-F6EECF244321}">
+                <p14:modId xmlns:p14="http://schemas.microsoft.com/office/powerpoint/2010/main" val="2575604780"/>
+              </p:ext>
+            </p:extLst>
+          </p:nvPr>
+        </p:nvGraphicFramePr>
+        <p:xfrm>
+          <a:off x="753036" y="1946350"/>
+          <a:ext cx="10954872" cy="4357315"/>
+        </p:xfrm>
+        <a:graphic>
+          <a:graphicData uri="http://schemas.openxmlformats.org/drawingml/2006/table">
+            <a:tbl>
+              <a:tblPr/>
+              <a:tblGrid>
+                <a:gridCol w="3651624">
+                  <a:extLst>
+                    <a:ext uri="{9D8B030D-6E8A-4147-A177-3AD203B41FA5}">
+                      <a16:colId xmlns:a16="http://schemas.microsoft.com/office/drawing/2014/main" val="1643597154"/>
+                    </a:ext>
+                  </a:extLst>
+                </a:gridCol>
+                <a:gridCol w="3651624">
+                  <a:extLst>
+                    <a:ext uri="{9D8B030D-6E8A-4147-A177-3AD203B41FA5}">
+                      <a16:colId xmlns:a16="http://schemas.microsoft.com/office/drawing/2014/main" val="1487544534"/>
+                    </a:ext>
+                  </a:extLst>
+                </a:gridCol>
+                <a:gridCol w="3651624">
+                  <a:extLst>
+                    <a:ext uri="{9D8B030D-6E8A-4147-A177-3AD203B41FA5}">
+                      <a16:colId xmlns:a16="http://schemas.microsoft.com/office/drawing/2014/main" val="459435501"/>
+                    </a:ext>
+                  </a:extLst>
+                </a:gridCol>
+              </a:tblGrid>
+              <a:tr h="275183">
+                <a:tc>
+                  <a:txBody>
+                    <a:bodyPr/>
+                    <a:lstStyle/>
+                    <a:p>
+                      <a:pPr algn="l" fontAlgn="t">
+                        <a:buNone/>
+                      </a:pPr>
+                      <a:r>
+                        <a:rPr lang="en-US" sz="1200" b="0">
+                          <a:solidFill>
+                            <a:srgbClr val="FFFFFF"/>
+                          </a:solidFill>
+                          <a:effectLst/>
+                        </a:rPr>
+                        <a:t>Step</a:t>
+                      </a:r>
+                    </a:p>
+                  </a:txBody>
+                  <a:tcPr marL="49140" marR="49140" marT="49140" marB="49140">
+                    <a:lnL>
+                      <a:noFill/>
+                    </a:lnL>
+                    <a:lnR>
+                      <a:noFill/>
+                    </a:lnR>
+                    <a:lnT>
+                      <a:noFill/>
+                    </a:lnT>
+                    <a:lnB w="9525" cap="flat" cmpd="sng" algn="ctr">
+                      <a:solidFill>
+                        <a:srgbClr val="444746"/>
+                      </a:solidFill>
+                      <a:prstDash val="solid"/>
+                      <a:round/>
+                      <a:headEnd type="none" w="med" len="med"/>
+                      <a:tailEnd type="none" w="med" len="med"/>
+                    </a:lnB>
+                    <a:solidFill>
+                      <a:srgbClr val="131314"/>
+                    </a:solidFill>
+                  </a:tcPr>
+                </a:tc>
+                <a:tc>
+                  <a:txBody>
+                    <a:bodyPr/>
+                    <a:lstStyle/>
+                    <a:p>
+                      <a:pPr algn="l" fontAlgn="t">
+                        <a:buNone/>
+                      </a:pPr>
+                      <a:r>
+                        <a:rPr lang="en-US" sz="1200" b="0">
+                          <a:solidFill>
+                            <a:srgbClr val="FFFFFF"/>
+                          </a:solidFill>
+                          <a:effectLst/>
+                        </a:rPr>
+                        <a:t>Action</a:t>
+                      </a:r>
+                    </a:p>
+                  </a:txBody>
+                  <a:tcPr marL="49140" marR="49140" marT="49140" marB="49140">
+                    <a:lnL>
+                      <a:noFill/>
+                    </a:lnL>
+                    <a:lnR>
+                      <a:noFill/>
+                    </a:lnR>
+                    <a:lnT>
+                      <a:noFill/>
+                    </a:lnT>
+                    <a:lnB w="9525" cap="flat" cmpd="sng" algn="ctr">
+                      <a:solidFill>
+                        <a:srgbClr val="444746"/>
+                      </a:solidFill>
+                      <a:prstDash val="solid"/>
+                      <a:round/>
+                      <a:headEnd type="none" w="med" len="med"/>
+                      <a:tailEnd type="none" w="med" len="med"/>
+                    </a:lnB>
+                    <a:solidFill>
+                      <a:srgbClr val="131314"/>
+                    </a:solidFill>
+                  </a:tcPr>
+                </a:tc>
+                <a:tc>
+                  <a:txBody>
+                    <a:bodyPr/>
+                    <a:lstStyle/>
+                    <a:p>
+                      <a:pPr algn="l" fontAlgn="t">
+                        <a:buNone/>
+                      </a:pPr>
+                      <a:r>
+                        <a:rPr lang="en-US" sz="1200" b="0">
+                          <a:solidFill>
+                            <a:srgbClr val="FFFFFF"/>
+                          </a:solidFill>
+                          <a:effectLst/>
+                        </a:rPr>
+                        <a:t>Details</a:t>
+                      </a:r>
+                    </a:p>
+                  </a:txBody>
+                  <a:tcPr marL="49140" marR="49140" marT="49140" marB="49140">
+                    <a:lnL>
+                      <a:noFill/>
+                    </a:lnL>
+                    <a:lnR>
+                      <a:noFill/>
+                    </a:lnR>
+                    <a:lnT>
+                      <a:noFill/>
+                    </a:lnT>
+                    <a:lnB w="9525" cap="flat" cmpd="sng" algn="ctr">
+                      <a:solidFill>
+                        <a:srgbClr val="444746"/>
+                      </a:solidFill>
+                      <a:prstDash val="solid"/>
+                      <a:round/>
+                      <a:headEnd type="none" w="med" len="med"/>
+                      <a:tailEnd type="none" w="med" len="med"/>
+                    </a:lnB>
+                    <a:solidFill>
+                      <a:srgbClr val="131314"/>
+                    </a:solidFill>
+                  </a:tcPr>
+                </a:tc>
+                <a:extLst>
+                  <a:ext uri="{0D108BD9-81ED-4DB2-BD59-A6C34878D82A}">
+                    <a16:rowId xmlns:a16="http://schemas.microsoft.com/office/drawing/2014/main" val="1668946431"/>
+                  </a:ext>
+                </a:extLst>
+              </a:tr>
+              <a:tr h="805894">
+                <a:tc>
+                  <a:txBody>
+                    <a:bodyPr/>
+                    <a:lstStyle/>
+                    <a:p>
+                      <a:pPr algn="l" fontAlgn="t">
+                        <a:buNone/>
+                      </a:pPr>
+                      <a:r>
+                        <a:rPr lang="en-US" sz="1200" b="0">
+                          <a:solidFill>
+                            <a:srgbClr val="FFFFFF"/>
+                          </a:solidFill>
+                          <a:effectLst/>
+                          <a:latin typeface="Google Sans Text"/>
+                        </a:rPr>
+                        <a:t>1. Go to the "Actions" tab</a:t>
+                      </a:r>
+                      <a:endParaRPr lang="en-US" sz="1200">
+                        <a:solidFill>
+                          <a:srgbClr val="FFFFFF"/>
+                        </a:solidFill>
+                        <a:effectLst/>
+                      </a:endParaRPr>
+                    </a:p>
+                  </a:txBody>
+                  <a:tcPr marL="49140" marR="49140" marT="49140" marB="49140">
+                    <a:lnL>
+                      <a:noFill/>
+                    </a:lnL>
+                    <a:lnR>
+                      <a:noFill/>
+                    </a:lnR>
+                    <a:lnT w="9525" cap="flat" cmpd="sng" algn="ctr">
+                      <a:solidFill>
+                        <a:srgbClr val="444746"/>
+                      </a:solidFill>
+                      <a:prstDash val="solid"/>
+                      <a:round/>
+                      <a:headEnd type="none" w="med" len="med"/>
+                      <a:tailEnd type="none" w="med" len="med"/>
+                    </a:lnT>
+                    <a:lnB w="9525" cap="flat" cmpd="sng" algn="ctr">
+                      <a:solidFill>
+                        <a:srgbClr val="444746"/>
+                      </a:solidFill>
+                      <a:prstDash val="solid"/>
+                      <a:round/>
+                      <a:headEnd type="none" w="med" len="med"/>
+                      <a:tailEnd type="none" w="med" len="med"/>
+                    </a:lnB>
+                    <a:solidFill>
+                      <a:srgbClr val="131314"/>
+                    </a:solidFill>
+                  </a:tcPr>
+                </a:tc>
+                <a:tc>
+                  <a:txBody>
+                    <a:bodyPr/>
+                    <a:lstStyle/>
+                    <a:p>
+                      <a:pPr algn="l" fontAlgn="t">
+                        <a:buNone/>
+                      </a:pPr>
+                      <a:r>
+                        <a:rPr lang="en-US" sz="1200">
+                          <a:solidFill>
+                            <a:srgbClr val="FFFFFF"/>
+                          </a:solidFill>
+                          <a:effectLst/>
+                        </a:rPr>
+                        <a:t>In your GitHub repository, click on the </a:t>
+                      </a:r>
+                      <a:r>
+                        <a:rPr lang="en-US" sz="1200" b="0">
+                          <a:solidFill>
+                            <a:srgbClr val="FFFFFF"/>
+                          </a:solidFill>
+                          <a:effectLst/>
+                          <a:latin typeface="Google Sans Text"/>
+                        </a:rPr>
+                        <a:t>Actions</a:t>
+                      </a:r>
+                      <a:r>
+                        <a:rPr lang="en-US" sz="1200">
+                          <a:solidFill>
+                            <a:srgbClr val="FFFFFF"/>
+                          </a:solidFill>
+                          <a:effectLst/>
+                        </a:rPr>
+                        <a:t> tab at the top.</a:t>
+                      </a:r>
+                    </a:p>
+                  </a:txBody>
+                  <a:tcPr marL="49140" marR="49140" marT="49140" marB="49140">
+                    <a:lnL>
+                      <a:noFill/>
+                    </a:lnL>
+                    <a:lnR>
+                      <a:noFill/>
+                    </a:lnR>
+                    <a:lnT w="9525" cap="flat" cmpd="sng" algn="ctr">
+                      <a:solidFill>
+                        <a:srgbClr val="444746"/>
+                      </a:solidFill>
+                      <a:prstDash val="solid"/>
+                      <a:round/>
+                      <a:headEnd type="none" w="med" len="med"/>
+                      <a:tailEnd type="none" w="med" len="med"/>
+                    </a:lnT>
+                    <a:lnB w="9525" cap="flat" cmpd="sng" algn="ctr">
+                      <a:solidFill>
+                        <a:srgbClr val="444746"/>
+                      </a:solidFill>
+                      <a:prstDash val="solid"/>
+                      <a:round/>
+                      <a:headEnd type="none" w="med" len="med"/>
+                      <a:tailEnd type="none" w="med" len="med"/>
+                    </a:lnB>
+                    <a:solidFill>
+                      <a:srgbClr val="131314"/>
+                    </a:solidFill>
+                  </a:tcPr>
+                </a:tc>
+                <a:tc>
+                  <a:txBody>
+                    <a:bodyPr/>
+                    <a:lstStyle/>
+                    <a:p>
+                      <a:pPr algn="l" fontAlgn="t">
+                        <a:buNone/>
+                      </a:pPr>
+                      <a:r>
+                        <a:rPr lang="en-US" sz="1200">
+                          <a:solidFill>
+                            <a:srgbClr val="FFFFFF"/>
+                          </a:solidFill>
+                          <a:effectLst/>
+                        </a:rPr>
+                        <a:t>GitHub might suggest some common workflow templates.</a:t>
+                      </a:r>
+                    </a:p>
+                  </a:txBody>
+                  <a:tcPr marL="49140" marR="49140" marT="49140" marB="49140">
+                    <a:lnL>
+                      <a:noFill/>
+                    </a:lnL>
+                    <a:lnR>
+                      <a:noFill/>
+                    </a:lnR>
+                    <a:lnT w="9525" cap="flat" cmpd="sng" algn="ctr">
+                      <a:solidFill>
+                        <a:srgbClr val="444746"/>
+                      </a:solidFill>
+                      <a:prstDash val="solid"/>
+                      <a:round/>
+                      <a:headEnd type="none" w="med" len="med"/>
+                      <a:tailEnd type="none" w="med" len="med"/>
+                    </a:lnT>
+                    <a:lnB w="9525" cap="flat" cmpd="sng" algn="ctr">
+                      <a:solidFill>
+                        <a:srgbClr val="444746"/>
+                      </a:solidFill>
+                      <a:prstDash val="solid"/>
+                      <a:round/>
+                      <a:headEnd type="none" w="med" len="med"/>
+                      <a:tailEnd type="none" w="med" len="med"/>
+                    </a:lnB>
+                    <a:solidFill>
+                      <a:srgbClr val="131314"/>
+                    </a:solidFill>
+                  </a:tcPr>
+                </a:tc>
+                <a:extLst>
+                  <a:ext uri="{0D108BD9-81ED-4DB2-BD59-A6C34878D82A}">
+                    <a16:rowId xmlns:a16="http://schemas.microsoft.com/office/drawing/2014/main" val="107813642"/>
+                  </a:ext>
+                </a:extLst>
+              </a:tr>
+              <a:tr h="1579848">
+                <a:tc>
+                  <a:txBody>
+                    <a:bodyPr/>
+                    <a:lstStyle/>
+                    <a:p>
+                      <a:pPr algn="l" fontAlgn="t">
+                        <a:buNone/>
+                      </a:pPr>
+                      <a:r>
+                        <a:rPr lang="en-US" sz="1200" b="0">
+                          <a:solidFill>
+                            <a:srgbClr val="FFFFFF"/>
+                          </a:solidFill>
+                          <a:effectLst/>
+                          <a:latin typeface="Google Sans Text"/>
+                        </a:rPr>
+                        <a:t>2. Create a New Workflow</a:t>
+                      </a:r>
+                      <a:endParaRPr lang="en-US" sz="1200">
+                        <a:solidFill>
+                          <a:srgbClr val="FFFFFF"/>
+                        </a:solidFill>
+                        <a:effectLst/>
+                      </a:endParaRPr>
+                    </a:p>
+                  </a:txBody>
+                  <a:tcPr marL="49140" marR="49140" marT="49140" marB="49140">
+                    <a:lnL>
+                      <a:noFill/>
+                    </a:lnL>
+                    <a:lnR>
+                      <a:noFill/>
+                    </a:lnR>
+                    <a:lnT w="9525" cap="flat" cmpd="sng" algn="ctr">
+                      <a:solidFill>
+                        <a:srgbClr val="444746"/>
+                      </a:solidFill>
+                      <a:prstDash val="solid"/>
+                      <a:round/>
+                      <a:headEnd type="none" w="med" len="med"/>
+                      <a:tailEnd type="none" w="med" len="med"/>
+                    </a:lnT>
+                    <a:lnB w="9525" cap="flat" cmpd="sng" algn="ctr">
+                      <a:solidFill>
+                        <a:srgbClr val="444746"/>
+                      </a:solidFill>
+                      <a:prstDash val="solid"/>
+                      <a:round/>
+                      <a:headEnd type="none" w="med" len="med"/>
+                      <a:tailEnd type="none" w="med" len="med"/>
+                    </a:lnB>
+                    <a:solidFill>
+                      <a:srgbClr val="131314"/>
+                    </a:solidFill>
+                  </a:tcPr>
+                </a:tc>
+                <a:tc>
+                  <a:txBody>
+                    <a:bodyPr/>
+                    <a:lstStyle/>
+                    <a:p>
+                      <a:pPr algn="l" fontAlgn="t">
+                        <a:buNone/>
+                      </a:pPr>
+                      <a:r>
+                        <a:rPr lang="en-US" sz="1200">
+                          <a:solidFill>
+                            <a:srgbClr val="FFFFFF"/>
+                          </a:solidFill>
+                          <a:effectLst/>
+                        </a:rPr>
+                        <a:t>Click the </a:t>
+                      </a:r>
+                      <a:r>
+                        <a:rPr lang="en-US" sz="1200" b="0">
+                          <a:solidFill>
+                            <a:srgbClr val="FFFFFF"/>
+                          </a:solidFill>
+                          <a:effectLst/>
+                          <a:latin typeface="Google Sans Text"/>
+                        </a:rPr>
+                        <a:t>"set up a workflow yourself"</a:t>
+                      </a:r>
+                      <a:r>
+                        <a:rPr lang="en-US" sz="1200">
+                          <a:solidFill>
+                            <a:srgbClr val="FFFFFF"/>
+                          </a:solidFill>
+                          <a:effectLst/>
+                        </a:rPr>
+                        <a:t> link.</a:t>
+                      </a:r>
+                    </a:p>
+                  </a:txBody>
+                  <a:tcPr marL="49140" marR="49140" marT="49140" marB="49140">
+                    <a:lnL>
+                      <a:noFill/>
+                    </a:lnL>
+                    <a:lnR>
+                      <a:noFill/>
+                    </a:lnR>
+                    <a:lnT w="9525" cap="flat" cmpd="sng" algn="ctr">
+                      <a:solidFill>
+                        <a:srgbClr val="444746"/>
+                      </a:solidFill>
+                      <a:prstDash val="solid"/>
+                      <a:round/>
+                      <a:headEnd type="none" w="med" len="med"/>
+                      <a:tailEnd type="none" w="med" len="med"/>
+                    </a:lnT>
+                    <a:lnB w="9525" cap="flat" cmpd="sng" algn="ctr">
+                      <a:solidFill>
+                        <a:srgbClr val="444746"/>
+                      </a:solidFill>
+                      <a:prstDash val="solid"/>
+                      <a:round/>
+                      <a:headEnd type="none" w="med" len="med"/>
+                      <a:tailEnd type="none" w="med" len="med"/>
+                    </a:lnB>
+                    <a:solidFill>
+                      <a:srgbClr val="131314"/>
+                    </a:solidFill>
+                  </a:tcPr>
+                </a:tc>
+                <a:tc>
+                  <a:txBody>
+                    <a:bodyPr/>
+                    <a:lstStyle/>
+                    <a:p>
+                      <a:pPr algn="l" fontAlgn="t">
+                        <a:lnSpc>
+                          <a:spcPts val="1800"/>
+                        </a:lnSpc>
+                        <a:buNone/>
+                      </a:pPr>
+                      <a:r>
+                        <a:rPr lang="en-US" sz="1200">
+                          <a:solidFill>
+                            <a:srgbClr val="FFFFFF"/>
+                          </a:solidFill>
+                          <a:effectLst/>
+                        </a:rPr>
+                        <a:t>This will open a new page where you can create a new file. The file will be pre-named </a:t>
+                      </a:r>
+                      <a:r>
+                        <a:rPr lang="en-US" sz="1200" b="0">
+                          <a:solidFill>
+                            <a:srgbClr val="FFFFFF"/>
+                          </a:solidFill>
+                          <a:effectLst/>
+                          <a:latin typeface="Google Sans Mono"/>
+                        </a:rPr>
+                        <a:t>main.yml</a:t>
+                      </a:r>
+                      <a:r>
+                        <a:rPr lang="en-US" sz="1200">
+                          <a:solidFill>
+                            <a:srgbClr val="FFFFFF"/>
+                          </a:solidFill>
+                          <a:effectLst/>
+                        </a:rPr>
+                        <a:t> and will be placed in a new folder called </a:t>
+                      </a:r>
+                      <a:r>
+                        <a:rPr lang="en-US" sz="1200" b="0">
+                          <a:solidFill>
+                            <a:srgbClr val="FFFFFF"/>
+                          </a:solidFill>
+                          <a:effectLst/>
+                          <a:latin typeface="Google Sans Mono"/>
+                        </a:rPr>
+                        <a:t>.github/workflows/</a:t>
+                      </a:r>
+                      <a:r>
+                        <a:rPr lang="en-US" sz="1200">
+                          <a:solidFill>
+                            <a:srgbClr val="FFFFFF"/>
+                          </a:solidFill>
+                          <a:effectLst/>
+                        </a:rPr>
+                        <a:t>. This is the correct location.</a:t>
+                      </a:r>
+                    </a:p>
+                  </a:txBody>
+                  <a:tcPr marL="49140" marR="49140" marT="49140" marB="49140">
+                    <a:lnL>
+                      <a:noFill/>
+                    </a:lnL>
+                    <a:lnR>
+                      <a:noFill/>
+                    </a:lnR>
+                    <a:lnT w="9525" cap="flat" cmpd="sng" algn="ctr">
+                      <a:solidFill>
+                        <a:srgbClr val="444746"/>
+                      </a:solidFill>
+                      <a:prstDash val="solid"/>
+                      <a:round/>
+                      <a:headEnd type="none" w="med" len="med"/>
+                      <a:tailEnd type="none" w="med" len="med"/>
+                    </a:lnT>
+                    <a:lnB w="9525" cap="flat" cmpd="sng" algn="ctr">
+                      <a:solidFill>
+                        <a:srgbClr val="444746"/>
+                      </a:solidFill>
+                      <a:prstDash val="solid"/>
+                      <a:round/>
+                      <a:headEnd type="none" w="med" len="med"/>
+                      <a:tailEnd type="none" w="med" len="med"/>
+                    </a:lnB>
+                    <a:solidFill>
+                      <a:srgbClr val="131314"/>
+                    </a:solidFill>
+                  </a:tcPr>
+                </a:tc>
+                <a:extLst>
+                  <a:ext uri="{0D108BD9-81ED-4DB2-BD59-A6C34878D82A}">
+                    <a16:rowId xmlns:a16="http://schemas.microsoft.com/office/drawing/2014/main" val="1832912460"/>
+                  </a:ext>
+                </a:extLst>
+              </a:tr>
+              <a:tr h="1690413">
+                <a:tc>
+                  <a:txBody>
+                    <a:bodyPr/>
+                    <a:lstStyle/>
+                    <a:p>
+                      <a:pPr algn="l" fontAlgn="t">
+                        <a:buNone/>
+                      </a:pPr>
+                      <a:r>
+                        <a:rPr lang="en-US" sz="1200" b="0">
+                          <a:solidFill>
+                            <a:srgbClr val="FFFFFF"/>
+                          </a:solidFill>
+                          <a:effectLst/>
+                          <a:latin typeface="Google Sans Text"/>
+                        </a:rPr>
+                        <a:t>3. Paste the Workflow Code</a:t>
+                      </a:r>
+                      <a:endParaRPr lang="en-US" sz="1200">
+                        <a:solidFill>
+                          <a:srgbClr val="FFFFFF"/>
+                        </a:solidFill>
+                        <a:effectLst/>
+                      </a:endParaRPr>
+                    </a:p>
+                  </a:txBody>
+                  <a:tcPr marL="49140" marR="49140" marT="49140" marB="49140">
+                    <a:lnL>
+                      <a:noFill/>
+                    </a:lnL>
+                    <a:lnR>
+                      <a:noFill/>
+                    </a:lnR>
+                    <a:lnT w="9525" cap="flat" cmpd="sng" algn="ctr">
+                      <a:solidFill>
+                        <a:srgbClr val="444746"/>
+                      </a:solidFill>
+                      <a:prstDash val="solid"/>
+                      <a:round/>
+                      <a:headEnd type="none" w="med" len="med"/>
+                      <a:tailEnd type="none" w="med" len="med"/>
+                    </a:lnT>
+                    <a:lnB>
+                      <a:noFill/>
+                    </a:lnB>
+                    <a:solidFill>
+                      <a:srgbClr val="131314"/>
+                    </a:solidFill>
+                  </a:tcPr>
+                </a:tc>
+                <a:tc>
+                  <a:txBody>
+                    <a:bodyPr/>
+                    <a:lstStyle/>
+                    <a:p>
+                      <a:pPr algn="l" fontAlgn="t">
+                        <a:buNone/>
+                      </a:pPr>
+                      <a:r>
+                        <a:rPr lang="en-US" sz="1200" dirty="0">
+                          <a:solidFill>
+                            <a:srgbClr val="FFFFFF"/>
+                          </a:solidFill>
+                          <a:effectLst/>
+                        </a:rPr>
+                        <a:t>Delete the boilerplate content that GitHub provides and paste the following code into the editor. </a:t>
+                      </a:r>
+                      <a:r>
+                        <a:rPr lang="en-US" sz="1200" b="0" dirty="0">
+                          <a:solidFill>
+                            <a:srgbClr val="FFFFFF"/>
+                          </a:solidFill>
+                          <a:effectLst/>
+                          <a:latin typeface="Google Sans Text"/>
+                        </a:rPr>
+                        <a:t>I have configured it specifically for your project structure.</a:t>
+                      </a:r>
+                      <a:endParaRPr lang="en-US" sz="1200" dirty="0">
+                        <a:solidFill>
+                          <a:srgbClr val="FFFFFF"/>
+                        </a:solidFill>
+                        <a:effectLst/>
+                      </a:endParaRPr>
+                    </a:p>
+                  </a:txBody>
+                  <a:tcPr marL="49140" marR="49140" marT="49140" marB="49140">
+                    <a:lnL>
+                      <a:noFill/>
+                    </a:lnL>
+                    <a:lnR>
+                      <a:noFill/>
+                    </a:lnR>
+                    <a:lnT w="9525" cap="flat" cmpd="sng" algn="ctr">
+                      <a:solidFill>
+                        <a:srgbClr val="444746"/>
+                      </a:solidFill>
+                      <a:prstDash val="solid"/>
+                      <a:round/>
+                      <a:headEnd type="none" w="med" len="med"/>
+                      <a:tailEnd type="none" w="med" len="med"/>
+                    </a:lnT>
+                    <a:lnB>
+                      <a:noFill/>
+                    </a:lnB>
+                    <a:solidFill>
+                      <a:srgbClr val="131314"/>
+                    </a:solidFill>
+                  </a:tcPr>
+                </a:tc>
+                <a:tc>
+                  <a:txBody>
+                    <a:bodyPr/>
+                    <a:lstStyle/>
+                    <a:p>
+                      <a:endParaRPr lang="en-US" sz="1200" dirty="0"/>
+                    </a:p>
+                  </a:txBody>
+                  <a:tcPr marL="58968" marR="58968" marT="29484" marB="29484">
+                    <a:lnL>
+                      <a:noFill/>
+                    </a:lnL>
+                    <a:lnT w="9525" cap="flat" cmpd="sng" algn="ctr">
+                      <a:solidFill>
+                        <a:srgbClr val="444746"/>
+                      </a:solidFill>
+                      <a:prstDash val="solid"/>
+                      <a:round/>
+                      <a:headEnd type="none" w="med" len="med"/>
+                      <a:tailEnd type="none" w="med" len="med"/>
+                    </a:lnT>
+                  </a:tcPr>
+                </a:tc>
+                <a:extLst>
+                  <a:ext uri="{0D108BD9-81ED-4DB2-BD59-A6C34878D82A}">
+                    <a16:rowId xmlns:a16="http://schemas.microsoft.com/office/drawing/2014/main" val="3926733683"/>
+                  </a:ext>
+                </a:extLst>
+              </a:tr>
+            </a:tbl>
+          </a:graphicData>
+        </a:graphic>
+      </p:graphicFrame>
+    </p:spTree>
+    <p:extLst>
+      <p:ext uri="{BB962C8B-B14F-4D97-AF65-F5344CB8AC3E}">
+        <p14:creationId xmlns:p14="http://schemas.microsoft.com/office/powerpoint/2010/main" val="3306274994"/>
+      </p:ext>
+    </p:extLst>
+  </p:cSld>
+  <p:clrMapOvr>
+    <a:masterClrMapping/>
+  </p:clrMapOvr>
+</p:sld>
+</file>
+
+<file path=ppt/slides/slide19.xml><?xml version="1.0" encoding="utf-8"?>
+<p:sld xmlns:a="http://schemas.openxmlformats.org/drawingml/2006/main" xmlns:r="http://schemas.openxmlformats.org/officeDocument/2006/relationships" xmlns:p="http://schemas.openxmlformats.org/presentationml/2006/main">
+  <p:cSld>
+    <p:spTree>
+      <p:nvGrpSpPr>
+        <p:cNvPr id="1" name=""/>
+        <p:cNvGrpSpPr/>
+        <p:nvPr/>
+      </p:nvGrpSpPr>
+      <p:grpSpPr>
+        <a:xfrm>
+          <a:off x="0" y="0"/>
+          <a:ext cx="0" cy="0"/>
+          <a:chOff x="0" y="0"/>
+          <a:chExt cx="0" cy="0"/>
+        </a:xfrm>
+      </p:grpSpPr>
+      <p:pic>
+        <p:nvPicPr>
+          <p:cNvPr id="3" name="Picture 2">
+            <a:extLst>
+              <a:ext uri="{FF2B5EF4-FFF2-40B4-BE49-F238E27FC236}">
+                <a16:creationId xmlns:a16="http://schemas.microsoft.com/office/drawing/2014/main" id="{BC67BBB8-8A93-89BC-0D2C-D1D52E50192D}"/>
+              </a:ext>
+            </a:extLst>
+          </p:cNvPr>
+          <p:cNvPicPr>
+            <a:picLocks noChangeAspect="1"/>
+          </p:cNvPicPr>
+          <p:nvPr/>
+        </p:nvPicPr>
+        <p:blipFill>
+          <a:blip r:embed="rId2"/>
+          <a:stretch>
+            <a:fillRect/>
+          </a:stretch>
+        </p:blipFill>
+        <p:spPr>
+          <a:xfrm>
+            <a:off x="4616674" y="0"/>
+            <a:ext cx="7575326" cy="6858000"/>
+          </a:xfrm>
+          <a:prstGeom prst="rect">
+            <a:avLst/>
+          </a:prstGeom>
+        </p:spPr>
+      </p:pic>
+      <p:sp>
+        <p:nvSpPr>
+          <p:cNvPr id="4" name="TextBox 3">
+            <a:extLst>
+              <a:ext uri="{FF2B5EF4-FFF2-40B4-BE49-F238E27FC236}">
+                <a16:creationId xmlns:a16="http://schemas.microsoft.com/office/drawing/2014/main" id="{1F5FAEA7-2694-3CFD-FE88-5C2BE935249E}"/>
+              </a:ext>
+            </a:extLst>
+          </p:cNvPr>
+          <p:cNvSpPr txBox="1"/>
+          <p:nvPr/>
+        </p:nvSpPr>
+        <p:spPr>
+          <a:xfrm>
+            <a:off x="923192" y="606669"/>
+            <a:ext cx="2400300" cy="369332"/>
           </a:xfrm>
           <a:prstGeom prst="rect">
             <a:avLst/>
@@ -4314,8 +6441,8 @@
           <a:lstStyle/>
           <a:p>
             <a:r>
-              <a:rPr lang="en-US"/>
-              <a:t>sadf</a:t>
+              <a:rPr lang="en-US" dirty="0"/>
+              <a:t>Finishing GitHub auth</a:t>
             </a:r>
           </a:p>
         </p:txBody>
@@ -4323,7 +6450,7 @@
     </p:spTree>
     <p:extLst>
       <p:ext uri="{BB962C8B-B14F-4D97-AF65-F5344CB8AC3E}">
-        <p14:creationId xmlns:p14="http://schemas.microsoft.com/office/powerpoint/2010/main" val="620128126"/>
+        <p14:creationId xmlns:p14="http://schemas.microsoft.com/office/powerpoint/2010/main" val="504004102"/>
       </p:ext>
     </p:extLst>
   </p:cSld>
@@ -4419,6 +6546,311 @@
     <p:extLst>
       <p:ext uri="{BB962C8B-B14F-4D97-AF65-F5344CB8AC3E}">
         <p14:creationId xmlns:p14="http://schemas.microsoft.com/office/powerpoint/2010/main" val="993993506"/>
+      </p:ext>
+    </p:extLst>
+  </p:cSld>
+  <p:clrMapOvr>
+    <a:masterClrMapping/>
+  </p:clrMapOvr>
+</p:sld>
+</file>
+
+<file path=ppt/slides/slide20.xml><?xml version="1.0" encoding="utf-8"?>
+<p:sld xmlns:a="http://schemas.openxmlformats.org/drawingml/2006/main" xmlns:r="http://schemas.openxmlformats.org/officeDocument/2006/relationships" xmlns:p="http://schemas.openxmlformats.org/presentationml/2006/main">
+  <p:cSld>
+    <p:spTree>
+      <p:nvGrpSpPr>
+        <p:cNvPr id="1" name=""/>
+        <p:cNvGrpSpPr/>
+        <p:nvPr/>
+      </p:nvGrpSpPr>
+      <p:grpSpPr>
+        <a:xfrm>
+          <a:off x="0" y="0"/>
+          <a:ext cx="0" cy="0"/>
+          <a:chOff x="0" y="0"/>
+          <a:chExt cx="0" cy="0"/>
+        </a:xfrm>
+      </p:grpSpPr>
+      <p:sp>
+        <p:nvSpPr>
+          <p:cNvPr id="2" name="TextBox 1">
+            <a:extLst>
+              <a:ext uri="{FF2B5EF4-FFF2-40B4-BE49-F238E27FC236}">
+                <a16:creationId xmlns:a16="http://schemas.microsoft.com/office/drawing/2014/main" id="{5C563D94-AEF0-25D6-1948-F1E9BAC0FEDD}"/>
+              </a:ext>
+            </a:extLst>
+          </p:cNvPr>
+          <p:cNvSpPr txBox="1"/>
+          <p:nvPr/>
+        </p:nvSpPr>
+        <p:spPr>
+          <a:xfrm>
+            <a:off x="1028700" y="1195754"/>
+            <a:ext cx="2268415" cy="646331"/>
+          </a:xfrm>
+          <a:prstGeom prst="rect">
+            <a:avLst/>
+          </a:prstGeom>
+          <a:noFill/>
+        </p:spPr>
+        <p:txBody>
+          <a:bodyPr wrap="square" rtlCol="0">
+            <a:spAutoFit/>
+          </a:bodyPr>
+          <a:lstStyle/>
+          <a:p>
+            <a:r>
+              <a:rPr lang="en-US" dirty="0"/>
+              <a:t>Connecting web app to GitHub</a:t>
+            </a:r>
+          </a:p>
+        </p:txBody>
+      </p:sp>
+      <p:pic>
+        <p:nvPicPr>
+          <p:cNvPr id="4" name="Picture 3">
+            <a:extLst>
+              <a:ext uri="{FF2B5EF4-FFF2-40B4-BE49-F238E27FC236}">
+                <a16:creationId xmlns:a16="http://schemas.microsoft.com/office/drawing/2014/main" id="{F57E78A7-7A2A-8D8D-9AB5-5C02B36C8B7F}"/>
+              </a:ext>
+            </a:extLst>
+          </p:cNvPr>
+          <p:cNvPicPr>
+            <a:picLocks noChangeAspect="1"/>
+          </p:cNvPicPr>
+          <p:nvPr/>
+        </p:nvPicPr>
+        <p:blipFill>
+          <a:blip r:embed="rId2"/>
+          <a:stretch>
+            <a:fillRect/>
+          </a:stretch>
+        </p:blipFill>
+        <p:spPr>
+          <a:xfrm>
+            <a:off x="2141283" y="0"/>
+            <a:ext cx="7909434" cy="6858000"/>
+          </a:xfrm>
+          <a:prstGeom prst="rect">
+            <a:avLst/>
+          </a:prstGeom>
+        </p:spPr>
+      </p:pic>
+    </p:spTree>
+    <p:extLst>
+      <p:ext uri="{BB962C8B-B14F-4D97-AF65-F5344CB8AC3E}">
+        <p14:creationId xmlns:p14="http://schemas.microsoft.com/office/powerpoint/2010/main" val="620128126"/>
+      </p:ext>
+    </p:extLst>
+  </p:cSld>
+  <p:clrMapOvr>
+    <a:masterClrMapping/>
+  </p:clrMapOvr>
+</p:sld>
+</file>
+
+<file path=ppt/slides/slide21.xml><?xml version="1.0" encoding="utf-8"?>
+<p:sld xmlns:a="http://schemas.openxmlformats.org/drawingml/2006/main" xmlns:r="http://schemas.openxmlformats.org/officeDocument/2006/relationships" xmlns:p="http://schemas.openxmlformats.org/presentationml/2006/main">
+  <p:cSld>
+    <p:spTree>
+      <p:nvGrpSpPr>
+        <p:cNvPr id="1" name=""/>
+        <p:cNvGrpSpPr/>
+        <p:nvPr/>
+      </p:nvGrpSpPr>
+      <p:grpSpPr>
+        <a:xfrm>
+          <a:off x="0" y="0"/>
+          <a:ext cx="0" cy="0"/>
+          <a:chOff x="0" y="0"/>
+          <a:chExt cx="0" cy="0"/>
+        </a:xfrm>
+      </p:grpSpPr>
+      <p:pic>
+        <p:nvPicPr>
+          <p:cNvPr id="3" name="Picture 2">
+            <a:extLst>
+              <a:ext uri="{FF2B5EF4-FFF2-40B4-BE49-F238E27FC236}">
+                <a16:creationId xmlns:a16="http://schemas.microsoft.com/office/drawing/2014/main" id="{DE39EFB6-0F86-E1E7-7FAE-21CA316D8995}"/>
+              </a:ext>
+            </a:extLst>
+          </p:cNvPr>
+          <p:cNvPicPr>
+            <a:picLocks noChangeAspect="1"/>
+          </p:cNvPicPr>
+          <p:nvPr/>
+        </p:nvPicPr>
+        <p:blipFill>
+          <a:blip r:embed="rId2"/>
+          <a:stretch>
+            <a:fillRect/>
+          </a:stretch>
+        </p:blipFill>
+        <p:spPr>
+          <a:xfrm>
+            <a:off x="2002812" y="0"/>
+            <a:ext cx="10189188" cy="6858000"/>
+          </a:xfrm>
+          <a:prstGeom prst="rect">
+            <a:avLst/>
+          </a:prstGeom>
+        </p:spPr>
+      </p:pic>
+    </p:spTree>
+    <p:extLst>
+      <p:ext uri="{BB962C8B-B14F-4D97-AF65-F5344CB8AC3E}">
+        <p14:creationId xmlns:p14="http://schemas.microsoft.com/office/powerpoint/2010/main" val="1696453183"/>
+      </p:ext>
+    </p:extLst>
+  </p:cSld>
+  <p:clrMapOvr>
+    <a:masterClrMapping/>
+  </p:clrMapOvr>
+</p:sld>
+</file>
+
+<file path=ppt/slides/slide22.xml><?xml version="1.0" encoding="utf-8"?>
+<p:sld xmlns:a="http://schemas.openxmlformats.org/drawingml/2006/main" xmlns:r="http://schemas.openxmlformats.org/officeDocument/2006/relationships" xmlns:p="http://schemas.openxmlformats.org/presentationml/2006/main">
+  <p:cSld>
+    <p:spTree>
+      <p:nvGrpSpPr>
+        <p:cNvPr id="1" name=""/>
+        <p:cNvGrpSpPr/>
+        <p:nvPr/>
+      </p:nvGrpSpPr>
+      <p:grpSpPr>
+        <a:xfrm>
+          <a:off x="0" y="0"/>
+          <a:ext cx="0" cy="0"/>
+          <a:chOff x="0" y="0"/>
+          <a:chExt cx="0" cy="0"/>
+        </a:xfrm>
+      </p:grpSpPr>
+      <p:pic>
+        <p:nvPicPr>
+          <p:cNvPr id="3" name="Picture 2">
+            <a:extLst>
+              <a:ext uri="{FF2B5EF4-FFF2-40B4-BE49-F238E27FC236}">
+                <a16:creationId xmlns:a16="http://schemas.microsoft.com/office/drawing/2014/main" id="{9485DF68-629B-A805-5DFB-D2ED4DD842AD}"/>
+              </a:ext>
+            </a:extLst>
+          </p:cNvPr>
+          <p:cNvPicPr>
+            <a:picLocks noChangeAspect="1"/>
+          </p:cNvPicPr>
+          <p:nvPr/>
+        </p:nvPicPr>
+        <p:blipFill>
+          <a:blip r:embed="rId2"/>
+          <a:stretch>
+            <a:fillRect/>
+          </a:stretch>
+        </p:blipFill>
+        <p:spPr>
+          <a:xfrm>
+            <a:off x="1001406" y="0"/>
+            <a:ext cx="10189188" cy="6858000"/>
+          </a:xfrm>
+          <a:prstGeom prst="rect">
+            <a:avLst/>
+          </a:prstGeom>
+        </p:spPr>
+      </p:pic>
+    </p:spTree>
+    <p:extLst>
+      <p:ext uri="{BB962C8B-B14F-4D97-AF65-F5344CB8AC3E}">
+        <p14:creationId xmlns:p14="http://schemas.microsoft.com/office/powerpoint/2010/main" val="1093736498"/>
+      </p:ext>
+    </p:extLst>
+  </p:cSld>
+  <p:clrMapOvr>
+    <a:masterClrMapping/>
+  </p:clrMapOvr>
+</p:sld>
+</file>
+
+<file path=ppt/slides/slide23.xml><?xml version="1.0" encoding="utf-8"?>
+<p:sld xmlns:a="http://schemas.openxmlformats.org/drawingml/2006/main" xmlns:r="http://schemas.openxmlformats.org/officeDocument/2006/relationships" xmlns:p="http://schemas.openxmlformats.org/presentationml/2006/main">
+  <p:cSld>
+    <p:spTree>
+      <p:nvGrpSpPr>
+        <p:cNvPr id="1" name=""/>
+        <p:cNvGrpSpPr/>
+        <p:nvPr/>
+      </p:nvGrpSpPr>
+      <p:grpSpPr>
+        <a:xfrm>
+          <a:off x="0" y="0"/>
+          <a:ext cx="0" cy="0"/>
+          <a:chOff x="0" y="0"/>
+          <a:chExt cx="0" cy="0"/>
+        </a:xfrm>
+      </p:grpSpPr>
+      <p:pic>
+        <p:nvPicPr>
+          <p:cNvPr id="3" name="Picture 2">
+            <a:extLst>
+              <a:ext uri="{FF2B5EF4-FFF2-40B4-BE49-F238E27FC236}">
+                <a16:creationId xmlns:a16="http://schemas.microsoft.com/office/drawing/2014/main" id="{89E21CDD-8DBA-F93E-162E-A178604C8A2A}"/>
+              </a:ext>
+            </a:extLst>
+          </p:cNvPr>
+          <p:cNvPicPr>
+            <a:picLocks noChangeAspect="1"/>
+          </p:cNvPicPr>
+          <p:nvPr/>
+        </p:nvPicPr>
+        <p:blipFill>
+          <a:blip r:embed="rId2"/>
+          <a:stretch>
+            <a:fillRect/>
+          </a:stretch>
+        </p:blipFill>
+        <p:spPr>
+          <a:xfrm>
+            <a:off x="1001406" y="0"/>
+            <a:ext cx="10189188" cy="6858000"/>
+          </a:xfrm>
+          <a:prstGeom prst="rect">
+            <a:avLst/>
+          </a:prstGeom>
+        </p:spPr>
+      </p:pic>
+    </p:spTree>
+    <p:extLst>
+      <p:ext uri="{BB962C8B-B14F-4D97-AF65-F5344CB8AC3E}">
+        <p14:creationId xmlns:p14="http://schemas.microsoft.com/office/powerpoint/2010/main" val="1866919619"/>
+      </p:ext>
+    </p:extLst>
+  </p:cSld>
+  <p:clrMapOvr>
+    <a:masterClrMapping/>
+  </p:clrMapOvr>
+</p:sld>
+</file>
+
+<file path=ppt/slides/slide24.xml><?xml version="1.0" encoding="utf-8"?>
+<p:sld xmlns:a="http://schemas.openxmlformats.org/drawingml/2006/main" xmlns:r="http://schemas.openxmlformats.org/officeDocument/2006/relationships" xmlns:p="http://schemas.openxmlformats.org/presentationml/2006/main">
+  <p:cSld>
+    <p:spTree>
+      <p:nvGrpSpPr>
+        <p:cNvPr id="1" name=""/>
+        <p:cNvGrpSpPr/>
+        <p:nvPr/>
+      </p:nvGrpSpPr>
+      <p:grpSpPr>
+        <a:xfrm>
+          <a:off x="0" y="0"/>
+          <a:ext cx="0" cy="0"/>
+          <a:chOff x="0" y="0"/>
+          <a:chExt cx="0" cy="0"/>
+        </a:xfrm>
+      </p:grpSpPr>
+    </p:spTree>
+    <p:extLst>
+      <p:ext uri="{BB962C8B-B14F-4D97-AF65-F5344CB8AC3E}">
+        <p14:creationId xmlns:p14="http://schemas.microsoft.com/office/powerpoint/2010/main" val="1398109960"/>
       </p:ext>
     </p:extLst>
   </p:cSld>

--- a/References/ProjectSnaps.pptx
+++ b/References/ProjectSnaps.pptx
@@ -6847,6 +6847,71 @@
           <a:chExt cx="0" cy="0"/>
         </a:xfrm>
       </p:grpSpPr>
+      <p:pic>
+        <p:nvPicPr>
+          <p:cNvPr id="3" name="Picture 2">
+            <a:extLst>
+              <a:ext uri="{FF2B5EF4-FFF2-40B4-BE49-F238E27FC236}">
+                <a16:creationId xmlns:a16="http://schemas.microsoft.com/office/drawing/2014/main" id="{49C1C62A-910D-5FDE-D15E-12DBD39ECBC7}"/>
+              </a:ext>
+            </a:extLst>
+          </p:cNvPr>
+          <p:cNvPicPr>
+            <a:picLocks noChangeAspect="1"/>
+          </p:cNvPicPr>
+          <p:nvPr/>
+        </p:nvPicPr>
+        <p:blipFill>
+          <a:blip r:embed="rId2"/>
+          <a:stretch>
+            <a:fillRect/>
+          </a:stretch>
+        </p:blipFill>
+        <p:spPr>
+          <a:xfrm>
+            <a:off x="4282566" y="0"/>
+            <a:ext cx="7909434" cy="6858000"/>
+          </a:xfrm>
+          <a:prstGeom prst="rect">
+            <a:avLst/>
+          </a:prstGeom>
+        </p:spPr>
+      </p:pic>
+      <p:sp>
+        <p:nvSpPr>
+          <p:cNvPr id="4" name="TextBox 3">
+            <a:extLst>
+              <a:ext uri="{FF2B5EF4-FFF2-40B4-BE49-F238E27FC236}">
+                <a16:creationId xmlns:a16="http://schemas.microsoft.com/office/drawing/2014/main" id="{C7DBA870-DC75-6A6B-8614-A7E513151A59}"/>
+              </a:ext>
+            </a:extLst>
+          </p:cNvPr>
+          <p:cNvSpPr txBox="1"/>
+          <p:nvPr/>
+        </p:nvSpPr>
+        <p:spPr>
+          <a:xfrm>
+            <a:off x="439615" y="597877"/>
+            <a:ext cx="2760785" cy="369332"/>
+          </a:xfrm>
+          <a:prstGeom prst="rect">
+            <a:avLst/>
+          </a:prstGeom>
+          <a:noFill/>
+        </p:spPr>
+        <p:txBody>
+          <a:bodyPr wrap="square" rtlCol="0">
+            <a:spAutoFit/>
+          </a:bodyPr>
+          <a:lstStyle/>
+          <a:p>
+            <a:r>
+              <a:rPr lang="en-US"/>
+              <a:t>New App GW</a:t>
+            </a:r>
+          </a:p>
+        </p:txBody>
+      </p:sp>
     </p:spTree>
     <p:extLst>
       <p:ext uri="{BB962C8B-B14F-4D97-AF65-F5344CB8AC3E}">
